--- a/ai101/slides/week-12.pptx
+++ b/ai101/slides/week-12.pptx
@@ -12,6 +12,10 @@
     <p:sldId id="260" r:id="rId11"/>
     <p:sldId id="261" r:id="rId12"/>
     <p:sldId id="262" r:id="rId13"/>
+    <p:sldId id="263" r:id="rId14"/>
+    <p:sldId id="264" r:id="rId15"/>
+    <p:sldId id="265" r:id="rId16"/>
+    <p:sldId id="266" r:id="rId17"/>
   </p:sldIdLst>
   <p:sldSz cx="12191695" cy="6858000" type="screen4x3"/>
   <p:notesSz cx="6858000" cy="9144000"/>
@@ -3166,6 +3170,260 @@
 </p:sld>
 </file>
 
+<file path=ppt/slides/slide10.xml><?xml version="1.0" encoding="utf-8"?>
+<p:sld xmlns:a="http://schemas.openxmlformats.org/drawingml/2006/main" xmlns:p="http://schemas.openxmlformats.org/presentationml/2006/main" xmlns:r="http://schemas.openxmlformats.org/officeDocument/2006/relationships">
+  <p:cSld>
+    <p:spTree>
+      <p:nvGrpSpPr>
+        <p:cNvPr id="1" name=""/>
+        <p:cNvGrpSpPr/>
+        <p:nvPr/>
+      </p:nvGrpSpPr>
+      <p:grpSpPr/>
+      <p:sp>
+        <p:nvSpPr>
+          <p:cNvPr id="2" name="Title 1"/>
+          <p:cNvSpPr>
+            <a:spLocks noGrp="1"/>
+          </p:cNvSpPr>
+          <p:nvPr>
+            <p:ph type="title"/>
+          </p:nvPr>
+        </p:nvSpPr>
+        <p:spPr/>
+        <p:txBody>
+          <a:bodyPr/>
+          <a:lstStyle/>
+          <a:p>
+            <a:r>
+              <a:rPr sz="3800" b="1">
+                <a:solidFill>
+                  <a:srgbClr val="1F2A37"/>
+                </a:solidFill>
+              </a:rPr>
+              <a:t>history.length = 0</a:t>
+            </a:r>
+          </a:p>
+        </p:txBody>
+      </p:sp>
+      <p:sp>
+        <p:nvSpPr>
+          <p:cNvPr id="3" name="TextBox 2"/>
+          <p:cNvSpPr txBox="1"/>
+          <p:nvPr/>
+        </p:nvSpPr>
+        <p:spPr>
+          <a:xfrm>
+            <a:off x="822960" y="1828800"/>
+            <a:ext cx="10515600" cy="4206240"/>
+          </a:xfrm>
+          <a:prstGeom prst="rect">
+            <a:avLst/>
+          </a:prstGeom>
+          <a:noFill/>
+        </p:spPr>
+        <p:txBody>
+          <a:bodyPr wrap="square">
+            <a:spAutoFit/>
+          </a:bodyPr>
+          <a:lstStyle/>
+          <a:p>
+            <a:pPr>
+              <a:spcAft>
+                <a:spcPts val="1400"/>
+              </a:spcAft>
+            </a:pPr>
+            <a:r>
+              <a:rPr sz="2800">
+                <a:solidFill>
+                  <a:srgbClr val="01AEFD"/>
+                </a:solidFill>
+              </a:rPr>
+              <a:t>not history = []</a:t>
+            </a:r>
+          </a:p>
+          <a:p>
+            <a:pPr>
+              <a:spcAft>
+                <a:spcPts val="1400"/>
+              </a:spcAft>
+            </a:pPr>
+            <a:r>
+              <a:rPr sz="2400">
+                <a:solidFill>
+                  <a:srgbClr val="1F2A37"/>
+                </a:solidFill>
+              </a:rPr>
+              <a:t>• const means you cannot replace the array</a:t>
+            </a:r>
+          </a:p>
+          <a:p>
+            <a:pPr>
+              <a:spcAft>
+                <a:spcPts val="1400"/>
+              </a:spcAft>
+            </a:pPr>
+            <a:r>
+              <a:rPr sz="2400">
+                <a:solidFill>
+                  <a:srgbClr val="1F2A37"/>
+                </a:solidFill>
+              </a:rPr>
+              <a:t>• But you can empty it</a:t>
+            </a:r>
+          </a:p>
+        </p:txBody>
+      </p:sp>
+    </p:spTree>
+  </p:cSld>
+  <p:clrMapOvr>
+    <a:masterClrMapping/>
+  </p:clrMapOvr>
+</p:sld>
+</file>
+
+<file path=ppt/slides/slide11.xml><?xml version="1.0" encoding="utf-8"?>
+<p:sld xmlns:a="http://schemas.openxmlformats.org/drawingml/2006/main" xmlns:p="http://schemas.openxmlformats.org/presentationml/2006/main" xmlns:r="http://schemas.openxmlformats.org/officeDocument/2006/relationships">
+  <p:cSld>
+    <p:spTree>
+      <p:nvGrpSpPr>
+        <p:cNvPr id="1" name=""/>
+        <p:cNvGrpSpPr/>
+        <p:nvPr/>
+      </p:nvGrpSpPr>
+      <p:grpSpPr/>
+      <p:sp>
+        <p:nvSpPr>
+          <p:cNvPr id="2" name="Title 1"/>
+          <p:cNvSpPr>
+            <a:spLocks noGrp="1"/>
+          </p:cNvSpPr>
+          <p:nvPr>
+            <p:ph type="title"/>
+          </p:nvPr>
+        </p:nvSpPr>
+        <p:spPr/>
+        <p:txBody>
+          <a:bodyPr/>
+          <a:lstStyle/>
+          <a:p>
+            <a:r>
+              <a:rPr sz="3800" b="1">
+                <a:solidFill>
+                  <a:srgbClr val="1F2A37"/>
+                </a:solidFill>
+              </a:rPr>
+              <a:t>Break your partner's Load</a:t>
+            </a:r>
+          </a:p>
+        </p:txBody>
+      </p:sp>
+      <p:sp>
+        <p:nvSpPr>
+          <p:cNvPr id="3" name="TextBox 2"/>
+          <p:cNvSpPr txBox="1"/>
+          <p:nvPr/>
+        </p:nvSpPr>
+        <p:spPr>
+          <a:xfrm>
+            <a:off x="822960" y="1828800"/>
+            <a:ext cx="10515600" cy="4206240"/>
+          </a:xfrm>
+          <a:prstGeom prst="rect">
+            <a:avLst/>
+          </a:prstGeom>
+          <a:noFill/>
+        </p:spPr>
+        <p:txBody>
+          <a:bodyPr wrap="square">
+            <a:spAutoFit/>
+          </a:bodyPr>
+          <a:lstStyle/>
+          <a:p>
+            <a:pPr>
+              <a:spcAft>
+                <a:spcPts val="1400"/>
+              </a:spcAft>
+            </a:pPr>
+            <a:r>
+              <a:rPr sz="2800">
+                <a:solidFill>
+                  <a:srgbClr val="01AEFD"/>
+                </a:solidFill>
+              </a:rPr>
+              <a:t>In pairs</a:t>
+            </a:r>
+          </a:p>
+          <a:p>
+            <a:pPr>
+              <a:spcAft>
+                <a:spcPts val="1400"/>
+              </a:spcAft>
+            </a:pPr>
+            <a:r>
+              <a:rPr sz="2400">
+                <a:solidFill>
+                  <a:srgbClr val="1F2A37"/>
+                </a:solidFill>
+              </a:rPr>
+              <a:t>• Paste rubbish</a:t>
+            </a:r>
+          </a:p>
+          <a:p>
+            <a:pPr>
+              <a:spcAft>
+                <a:spcPts val="1400"/>
+              </a:spcAft>
+            </a:pPr>
+            <a:r>
+              <a:rPr sz="2400">
+                <a:solidFill>
+                  <a:srgbClr val="1F2A37"/>
+                </a:solidFill>
+              </a:rPr>
+              <a:t>• Paste half a chat</a:t>
+            </a:r>
+          </a:p>
+          <a:p>
+            <a:pPr>
+              <a:spcAft>
+                <a:spcPts val="1400"/>
+              </a:spcAft>
+            </a:pPr>
+            <a:r>
+              <a:rPr sz="2400">
+                <a:solidFill>
+                  <a:srgbClr val="1F2A37"/>
+                </a:solidFill>
+              </a:rPr>
+              <a:t>• Paste a number</a:t>
+            </a:r>
+          </a:p>
+          <a:p>
+            <a:pPr>
+              <a:spcAft>
+                <a:spcPts val="1400"/>
+              </a:spcAft>
+            </a:pPr>
+            <a:r>
+              <a:rPr sz="2400">
+                <a:solidFill>
+                  <a:srgbClr val="1F2A37"/>
+                </a:solidFill>
+              </a:rPr>
+              <a:t>• Survive everything and you win</a:t>
+            </a:r>
+          </a:p>
+        </p:txBody>
+      </p:sp>
+    </p:spTree>
+  </p:cSld>
+  <p:clrMapOvr>
+    <a:masterClrMapping/>
+  </p:clrMapOvr>
+</p:sld>
+</file>
+
 <file path=ppt/slides/slide2.xml><?xml version="1.0" encoding="utf-8"?>
 <p:sld xmlns:a="http://schemas.openxmlformats.org/drawingml/2006/main" xmlns:p="http://schemas.openxmlformats.org/presentationml/2006/main" xmlns:r="http://schemas.openxmlformats.org/officeDocument/2006/relationships">
   <p:cSld>
@@ -3505,6 +3763,14 @@
 <file path=ppt/slides/slide5.xml><?xml version="1.0" encoding="utf-8"?>
 <p:sld xmlns:a="http://schemas.openxmlformats.org/drawingml/2006/main" xmlns:p="http://schemas.openxmlformats.org/presentationml/2006/main" xmlns:r="http://schemas.openxmlformats.org/officeDocument/2006/relationships">
   <p:cSld>
+    <p:bg>
+      <p:bgPr>
+        <a:solidFill>
+          <a:srgbClr val="102127"/>
+        </a:solidFill>
+        <a:effectLst/>
+      </p:bgPr>
+    </p:bg>
     <p:spTree>
       <p:nvGrpSpPr>
         <p:cNvPr id="1" name=""/>
@@ -3514,40 +3780,14 @@
       <p:grpSpPr/>
       <p:sp>
         <p:nvSpPr>
-          <p:cNvPr id="2" name="Title 1"/>
-          <p:cNvSpPr>
-            <a:spLocks noGrp="1"/>
-          </p:cNvSpPr>
-          <p:nvPr>
-            <p:ph type="title"/>
-          </p:nvPr>
-        </p:nvSpPr>
-        <p:spPr/>
-        <p:txBody>
-          <a:bodyPr/>
-          <a:lstStyle/>
-          <a:p>
-            <a:r>
-              <a:rPr sz="3800" b="1">
-                <a:solidFill>
-                  <a:srgbClr val="1F2A37"/>
-                </a:solidFill>
-              </a:rPr>
-              <a:t>Anyone can paste anything</a:t>
-            </a:r>
-          </a:p>
-        </p:txBody>
-      </p:sp>
-      <p:sp>
-        <p:nvSpPr>
-          <p:cNvPr id="3" name="TextBox 2"/>
+          <p:cNvPr id="2" name="TextBox 1"/>
           <p:cNvSpPr txBox="1"/>
           <p:nvPr/>
         </p:nvSpPr>
         <p:spPr>
           <a:xfrm>
-            <a:off x="822960" y="1828800"/>
-            <a:ext cx="10515600" cy="4206240"/>
+            <a:off x="502920" y="274320"/>
+            <a:ext cx="11155680" cy="731520"/>
           </a:xfrm>
           <a:prstGeom prst="rect">
             <a:avLst/>
@@ -3555,53 +3795,191 @@
           <a:noFill/>
         </p:spPr>
         <p:txBody>
-          <a:bodyPr wrap="square">
+          <a:bodyPr wrap="none">
             <a:spAutoFit/>
           </a:bodyPr>
           <a:lstStyle/>
           <a:p>
-            <a:pPr>
-              <a:spcAft>
-                <a:spcPts val="1400"/>
-              </a:spcAft>
-            </a:pPr>
-            <a:r>
-              <a:rPr sz="2400">
-                <a:solidFill>
-                  <a:srgbClr val="1F2A37"/>
-                </a:solidFill>
-              </a:rPr>
-              <a:t>• try/catch around parse</a:t>
-            </a:r>
-          </a:p>
-          <a:p>
-            <a:pPr>
-              <a:spcAft>
-                <a:spcPts val="1400"/>
-              </a:spcAft>
-            </a:pPr>
-            <a:r>
-              <a:rPr sz="2400">
-                <a:solidFill>
-                  <a:srgbClr val="1F2A37"/>
-                </a:solidFill>
-              </a:rPr>
-              <a:t>• Check it is actually a list</a:t>
-            </a:r>
-          </a:p>
-          <a:p>
-            <a:pPr>
-              <a:spcAft>
-                <a:spcPts val="1400"/>
-              </a:spcAft>
-            </a:pPr>
-            <a:r>
-              <a:rPr sz="2400">
-                <a:solidFill>
-                  <a:srgbClr val="1F2A37"/>
-                </a:solidFill>
-              </a:rPr>
-              <a:t>• Valid JSON is not the same as useful data</a:t>
+            <a:r>
+              <a:rPr sz="2600" b="1">
+                <a:solidFill>
+                  <a:srgbClr val="01AEFD"/>
+                </a:solidFill>
+              </a:rPr>
+              <a:t>Type this into index.html  (1 of 2)</a:t>
+            </a:r>
+          </a:p>
+        </p:txBody>
+      </p:sp>
+      <p:sp>
+        <p:nvSpPr>
+          <p:cNvPr id="3" name="TextBox 2"/>
+          <p:cNvSpPr txBox="1"/>
+          <p:nvPr/>
+        </p:nvSpPr>
+        <p:spPr>
+          <a:xfrm>
+            <a:off x="502920" y="1051560"/>
+            <a:ext cx="11155680" cy="5394960"/>
+          </a:xfrm>
+          <a:prstGeom prst="rect">
+            <a:avLst/>
+          </a:prstGeom>
+          <a:noFill/>
+        </p:spPr>
+        <p:txBody>
+          <a:bodyPr wrap="none">
+            <a:spAutoFit/>
+          </a:bodyPr>
+          <a:lstStyle/>
+          <a:p>
+            <a:pPr>
+              <a:spcAft>
+                <a:spcPts val="0"/>
+              </a:spcAft>
+            </a:pPr>
+            <a:r>
+              <a:rPr sz="1700">
+                <a:solidFill>
+                  <a:srgbClr val="6D8C97"/>
+                </a:solidFill>
+                <a:latin typeface="Consolas"/>
+              </a:rPr>
+              <a:t>  26  </a:t>
+            </a:r>
+            <a:r>
+              <a:rPr sz="1700">
+                <a:solidFill>
+                  <a:srgbClr val="7FE0A0"/>
+                </a:solidFill>
+                <a:latin typeface="Consolas"/>
+              </a:rPr>
+              <a:t>  &lt;details class="setup"&gt;</a:t>
+            </a:r>
+          </a:p>
+          <a:p>
+            <a:pPr>
+              <a:spcAft>
+                <a:spcPts val="0"/>
+              </a:spcAft>
+            </a:pPr>
+            <a:r>
+              <a:rPr sz="1700">
+                <a:solidFill>
+                  <a:srgbClr val="6D8C97"/>
+                </a:solidFill>
+                <a:latin typeface="Consolas"/>
+              </a:rPr>
+              <a:t>  27  </a:t>
+            </a:r>
+            <a:r>
+              <a:rPr sz="1700">
+                <a:solidFill>
+                  <a:srgbClr val="7FE0A0"/>
+                </a:solidFill>
+                <a:latin typeface="Consolas"/>
+              </a:rPr>
+              <a:t>    &lt;summary&gt;Save or load this chat&lt;/summary&gt;</a:t>
+            </a:r>
+          </a:p>
+          <a:p>
+            <a:pPr>
+              <a:spcAft>
+                <a:spcPts val="0"/>
+              </a:spcAft>
+            </a:pPr>
+            <a:r>
+              <a:rPr sz="1700">
+                <a:solidFill>
+                  <a:srgbClr val="6D8C97"/>
+                </a:solidFill>
+                <a:latin typeface="Consolas"/>
+              </a:rPr>
+              <a:t>  28  </a:t>
+            </a:r>
+            <a:r>
+              <a:rPr sz="1700">
+                <a:solidFill>
+                  <a:srgbClr val="7FE0A0"/>
+                </a:solidFill>
+                <a:latin typeface="Consolas"/>
+              </a:rPr>
+              <a:t>    &lt;textarea id="transcript" rows="4" placeholder="Press Save to put your chat here, then copy it somewhere safe."&gt;&lt;/textarea&gt;</a:t>
+            </a:r>
+          </a:p>
+          <a:p>
+            <a:pPr>
+              <a:spcAft>
+                <a:spcPts val="0"/>
+              </a:spcAft>
+            </a:pPr>
+            <a:r>
+              <a:rPr sz="1700">
+                <a:solidFill>
+                  <a:srgbClr val="6D8C97"/>
+                </a:solidFill>
+                <a:latin typeface="Consolas"/>
+              </a:rPr>
+              <a:t>  29  </a:t>
+            </a:r>
+            <a:r>
+              <a:rPr sz="1700">
+                <a:solidFill>
+                  <a:srgbClr val="7FE0A0"/>
+                </a:solidFill>
+                <a:latin typeface="Consolas"/>
+              </a:rPr>
+              <a:t>    &lt;button id="save" type="button"&gt;Save&lt;/button&gt;</a:t>
+            </a:r>
+          </a:p>
+          <a:p>
+            <a:pPr>
+              <a:spcAft>
+                <a:spcPts val="0"/>
+              </a:spcAft>
+            </a:pPr>
+            <a:r>
+              <a:rPr sz="1700">
+                <a:solidFill>
+                  <a:srgbClr val="6D8C97"/>
+                </a:solidFill>
+                <a:latin typeface="Consolas"/>
+              </a:rPr>
+              <a:t>  30  </a:t>
+            </a:r>
+            <a:r>
+              <a:rPr sz="1700">
+                <a:solidFill>
+                  <a:srgbClr val="7FE0A0"/>
+                </a:solidFill>
+                <a:latin typeface="Consolas"/>
+              </a:rPr>
+              <a:t>    &lt;button id="load" type="button"&gt;Load&lt;/button&gt;</a:t>
+            </a:r>
+          </a:p>
+          <a:p>
+            <a:pPr>
+              <a:spcAft>
+                <a:spcPts val="0"/>
+              </a:spcAft>
+            </a:pPr>
+            <a:r>
+              <a:rPr sz="1700">
+                <a:solidFill>
+                  <a:srgbClr val="6D8C97"/>
+                </a:solidFill>
+                <a:latin typeface="Consolas"/>
+              </a:rPr>
+              <a:t>  31  </a:t>
+            </a:r>
+            <a:r>
+              <a:rPr sz="1700">
+                <a:solidFill>
+                  <a:srgbClr val="7FE0A0"/>
+                </a:solidFill>
+                <a:latin typeface="Consolas"/>
+              </a:rPr>
+              <a:t>  &lt;/details&gt;</a:t>
             </a:r>
           </a:p>
         </p:txBody>
@@ -3617,6 +3995,14 @@
 <file path=ppt/slides/slide6.xml><?xml version="1.0" encoding="utf-8"?>
 <p:sld xmlns:a="http://schemas.openxmlformats.org/drawingml/2006/main" xmlns:p="http://schemas.openxmlformats.org/presentationml/2006/main" xmlns:r="http://schemas.openxmlformats.org/officeDocument/2006/relationships">
   <p:cSld>
+    <p:bg>
+      <p:bgPr>
+        <a:solidFill>
+          <a:srgbClr val="102127"/>
+        </a:solidFill>
+        <a:effectLst/>
+      </p:bgPr>
+    </p:bg>
     <p:spTree>
       <p:nvGrpSpPr>
         <p:cNvPr id="1" name=""/>
@@ -3626,40 +4012,14 @@
       <p:grpSpPr/>
       <p:sp>
         <p:nvSpPr>
-          <p:cNvPr id="2" name="Title 1"/>
-          <p:cNvSpPr>
-            <a:spLocks noGrp="1"/>
-          </p:cNvSpPr>
-          <p:nvPr>
-            <p:ph type="title"/>
-          </p:nvPr>
-        </p:nvSpPr>
-        <p:spPr/>
-        <p:txBody>
-          <a:bodyPr/>
-          <a:lstStyle/>
-          <a:p>
-            <a:r>
-              <a:rPr sz="3800" b="1">
-                <a:solidFill>
-                  <a:srgbClr val="1F2A37"/>
-                </a:solidFill>
-              </a:rPr>
-              <a:t>history.length = 0</a:t>
-            </a:r>
-          </a:p>
-        </p:txBody>
-      </p:sp>
-      <p:sp>
-        <p:nvSpPr>
-          <p:cNvPr id="3" name="TextBox 2"/>
+          <p:cNvPr id="2" name="TextBox 1"/>
           <p:cNvSpPr txBox="1"/>
           <p:nvPr/>
         </p:nvSpPr>
         <p:spPr>
           <a:xfrm>
-            <a:off x="822960" y="1828800"/>
-            <a:ext cx="10515600" cy="4206240"/>
+            <a:off x="502920" y="274320"/>
+            <a:ext cx="11155680" cy="731520"/>
           </a:xfrm>
           <a:prstGeom prst="rect">
             <a:avLst/>
@@ -3667,53 +4027,366 @@
           <a:noFill/>
         </p:spPr>
         <p:txBody>
-          <a:bodyPr wrap="square">
+          <a:bodyPr wrap="none">
             <a:spAutoFit/>
           </a:bodyPr>
           <a:lstStyle/>
           <a:p>
-            <a:pPr>
-              <a:spcAft>
-                <a:spcPts val="1400"/>
-              </a:spcAft>
-            </a:pPr>
-            <a:r>
-              <a:rPr sz="2800">
+            <a:r>
+              <a:rPr sz="2600" b="1">
                 <a:solidFill>
                   <a:srgbClr val="01AEFD"/>
                 </a:solidFill>
               </a:rPr>
-              <a:t>not history = []</a:t>
-            </a:r>
-          </a:p>
-          <a:p>
-            <a:pPr>
-              <a:spcAft>
-                <a:spcPts val="1400"/>
-              </a:spcAft>
-            </a:pPr>
-            <a:r>
-              <a:rPr sz="2400">
-                <a:solidFill>
-                  <a:srgbClr val="1F2A37"/>
-                </a:solidFill>
-              </a:rPr>
-              <a:t>• const means you cannot replace the array</a:t>
-            </a:r>
-          </a:p>
-          <a:p>
-            <a:pPr>
-              <a:spcAft>
-                <a:spcPts val="1400"/>
-              </a:spcAft>
-            </a:pPr>
-            <a:r>
-              <a:rPr sz="2400">
-                <a:solidFill>
-                  <a:srgbClr val="1F2A37"/>
-                </a:solidFill>
-              </a:rPr>
-              <a:t>• But you can empty it</a:t>
+              <a:t>Type this into script.js  (2 of 2)</a:t>
+            </a:r>
+          </a:p>
+        </p:txBody>
+      </p:sp>
+      <p:sp>
+        <p:nvSpPr>
+          <p:cNvPr id="3" name="TextBox 2"/>
+          <p:cNvSpPr txBox="1"/>
+          <p:nvPr/>
+        </p:nvSpPr>
+        <p:spPr>
+          <a:xfrm>
+            <a:off x="502920" y="1051560"/>
+            <a:ext cx="11155680" cy="5394960"/>
+          </a:xfrm>
+          <a:prstGeom prst="rect">
+            <a:avLst/>
+          </a:prstGeom>
+          <a:noFill/>
+        </p:spPr>
+        <p:txBody>
+          <a:bodyPr wrap="none">
+            <a:spAutoFit/>
+          </a:bodyPr>
+          <a:lstStyle/>
+          <a:p>
+            <a:pPr>
+              <a:spcAft>
+                <a:spcPts val="0"/>
+              </a:spcAft>
+            </a:pPr>
+            <a:r>
+              <a:rPr sz="1400">
+                <a:solidFill>
+                  <a:srgbClr val="6D8C97"/>
+                </a:solidFill>
+                <a:latin typeface="Consolas"/>
+              </a:rPr>
+              <a:t>   8  </a:t>
+            </a:r>
+            <a:r>
+              <a:rPr sz="1400">
+                <a:solidFill>
+                  <a:srgbClr val="DCECEF"/>
+                </a:solidFill>
+                <a:latin typeface="Consolas"/>
+              </a:rPr>
+              <a:t> </a:t>
+            </a:r>
+          </a:p>
+          <a:p>
+            <a:pPr>
+              <a:spcAft>
+                <a:spcPts val="0"/>
+              </a:spcAft>
+            </a:pPr>
+            <a:r>
+              <a:rPr sz="1400">
+                <a:solidFill>
+                  <a:srgbClr val="6D8C97"/>
+                </a:solidFill>
+                <a:latin typeface="Consolas"/>
+              </a:rPr>
+              <a:t>   9  </a:t>
+            </a:r>
+            <a:r>
+              <a:rPr sz="1400">
+                <a:solidFill>
+                  <a:srgbClr val="DCECEF"/>
+                </a:solidFill>
+                <a:latin typeface="Consolas"/>
+              </a:rPr>
+              <a:t>// Week 2: find the boxes we named in index.html.</a:t>
+            </a:r>
+          </a:p>
+          <a:p>
+            <a:pPr>
+              <a:spcAft>
+                <a:spcPts val="0"/>
+              </a:spcAft>
+            </a:pPr>
+            <a:r>
+              <a:rPr sz="1400">
+                <a:solidFill>
+                  <a:srgbClr val="6D8C97"/>
+                </a:solidFill>
+                <a:latin typeface="Consolas"/>
+              </a:rPr>
+              <a:t>  10  </a:t>
+            </a:r>
+            <a:r>
+              <a:rPr sz="1400">
+                <a:solidFill>
+                  <a:srgbClr val="DCECEF"/>
+                </a:solidFill>
+                <a:latin typeface="Consolas"/>
+              </a:rPr>
+              <a:t>// document.getElementById looks for the id= we wrote on each element.</a:t>
+            </a:r>
+          </a:p>
+          <a:p>
+            <a:pPr>
+              <a:spcAft>
+                <a:spcPts val="0"/>
+              </a:spcAft>
+            </a:pPr>
+            <a:r>
+              <a:rPr sz="1400">
+                <a:solidFill>
+                  <a:srgbClr val="6D8C97"/>
+                </a:solidFill>
+                <a:latin typeface="Consolas"/>
+              </a:rPr>
+              <a:t>  11  </a:t>
+            </a:r>
+            <a:r>
+              <a:rPr sz="1400">
+                <a:solidFill>
+                  <a:srgbClr val="DCECEF"/>
+                </a:solidFill>
+                <a:latin typeface="Consolas"/>
+              </a:rPr>
+              <a:t>const chat = document.getElementById('chat');</a:t>
+            </a:r>
+          </a:p>
+          <a:p>
+            <a:pPr>
+              <a:spcAft>
+                <a:spcPts val="0"/>
+              </a:spcAft>
+            </a:pPr>
+            <a:r>
+              <a:rPr sz="1400">
+                <a:solidFill>
+                  <a:srgbClr val="6D8C97"/>
+                </a:solidFill>
+                <a:latin typeface="Consolas"/>
+              </a:rPr>
+              <a:t>  12  </a:t>
+            </a:r>
+            <a:r>
+              <a:rPr sz="1400">
+                <a:solidFill>
+                  <a:srgbClr val="DCECEF"/>
+                </a:solidFill>
+                <a:latin typeface="Consolas"/>
+              </a:rPr>
+              <a:t>const composer = document.getElementById('composer');</a:t>
+            </a:r>
+          </a:p>
+          <a:p>
+            <a:pPr>
+              <a:spcAft>
+                <a:spcPts val="0"/>
+              </a:spcAft>
+            </a:pPr>
+            <a:r>
+              <a:rPr sz="1400">
+                <a:solidFill>
+                  <a:srgbClr val="6D8C97"/>
+                </a:solidFill>
+                <a:latin typeface="Consolas"/>
+              </a:rPr>
+              <a:t>  13  </a:t>
+            </a:r>
+            <a:r>
+              <a:rPr sz="1400">
+                <a:solidFill>
+                  <a:srgbClr val="DCECEF"/>
+                </a:solidFill>
+                <a:latin typeface="Consolas"/>
+              </a:rPr>
+              <a:t>const promptBox = document.getElementById('prompt');</a:t>
+            </a:r>
+          </a:p>
+          <a:p>
+            <a:pPr>
+              <a:spcAft>
+                <a:spcPts val="0"/>
+              </a:spcAft>
+            </a:pPr>
+            <a:r>
+              <a:rPr sz="1400">
+                <a:solidFill>
+                  <a:srgbClr val="6D8C97"/>
+                </a:solidFill>
+                <a:latin typeface="Consolas"/>
+              </a:rPr>
+              <a:t>  14  </a:t>
+            </a:r>
+            <a:r>
+              <a:rPr sz="1400">
+                <a:solidFill>
+                  <a:srgbClr val="DCECEF"/>
+                </a:solidFill>
+                <a:latin typeface="Consolas"/>
+              </a:rPr>
+              <a:t>const personaBox = document.getElementById('persona');</a:t>
+            </a:r>
+          </a:p>
+          <a:p>
+            <a:pPr>
+              <a:spcAft>
+                <a:spcPts val="0"/>
+              </a:spcAft>
+            </a:pPr>
+            <a:r>
+              <a:rPr sz="1400">
+                <a:solidFill>
+                  <a:srgbClr val="6D8C97"/>
+                </a:solidFill>
+                <a:latin typeface="Consolas"/>
+              </a:rPr>
+              <a:t>  15  </a:t>
+            </a:r>
+            <a:r>
+              <a:rPr sz="1400">
+                <a:solidFill>
+                  <a:srgbClr val="DCECEF"/>
+                </a:solidFill>
+                <a:latin typeface="Consolas"/>
+              </a:rPr>
+              <a:t>const modelBox = document.getElementById('model');</a:t>
+            </a:r>
+          </a:p>
+          <a:p>
+            <a:pPr>
+              <a:spcAft>
+                <a:spcPts val="0"/>
+              </a:spcAft>
+            </a:pPr>
+            <a:r>
+              <a:rPr sz="1400">
+                <a:solidFill>
+                  <a:srgbClr val="6D8C97"/>
+                </a:solidFill>
+                <a:latin typeface="Consolas"/>
+              </a:rPr>
+              <a:t>  16  </a:t>
+            </a:r>
+            <a:r>
+              <a:rPr sz="1400">
+                <a:solidFill>
+                  <a:srgbClr val="DCECEF"/>
+                </a:solidFill>
+                <a:latin typeface="Consolas"/>
+              </a:rPr>
+              <a:t>const tempBox = document.getElementById('temp');</a:t>
+            </a:r>
+          </a:p>
+          <a:p>
+            <a:pPr>
+              <a:spcAft>
+                <a:spcPts val="0"/>
+              </a:spcAft>
+            </a:pPr>
+            <a:r>
+              <a:rPr sz="1400">
+                <a:solidFill>
+                  <a:srgbClr val="6D8C97"/>
+                </a:solidFill>
+                <a:latin typeface="Consolas"/>
+              </a:rPr>
+              <a:t>  17  </a:t>
+            </a:r>
+            <a:r>
+              <a:rPr sz="1400">
+                <a:solidFill>
+                  <a:srgbClr val="DCECEF"/>
+                </a:solidFill>
+                <a:latin typeface="Consolas"/>
+              </a:rPr>
+              <a:t>const tempOut = document.getElementById('tempOut');</a:t>
+            </a:r>
+          </a:p>
+          <a:p>
+            <a:pPr>
+              <a:spcAft>
+                <a:spcPts val="0"/>
+              </a:spcAft>
+            </a:pPr>
+            <a:r>
+              <a:rPr sz="1400">
+                <a:solidFill>
+                  <a:srgbClr val="6D8C97"/>
+                </a:solidFill>
+                <a:latin typeface="Consolas"/>
+              </a:rPr>
+              <a:t>  18  </a:t>
+            </a:r>
+            <a:r>
+              <a:rPr sz="1400">
+                <a:solidFill>
+                  <a:srgbClr val="7FE0A0"/>
+                </a:solidFill>
+                <a:latin typeface="Consolas"/>
+              </a:rPr>
+              <a:t>const transcriptBox = document.getElementById('transcript');</a:t>
+            </a:r>
+          </a:p>
+          <a:p>
+            <a:pPr>
+              <a:spcAft>
+                <a:spcPts val="0"/>
+              </a:spcAft>
+            </a:pPr>
+            <a:r>
+              <a:rPr sz="1400">
+                <a:solidFill>
+                  <a:srgbClr val="6D8C97"/>
+                </a:solidFill>
+                <a:latin typeface="Consolas"/>
+              </a:rPr>
+              <a:t>  19  </a:t>
+            </a:r>
+            <a:r>
+              <a:rPr sz="1400">
+                <a:solidFill>
+                  <a:srgbClr val="7FE0A0"/>
+                </a:solidFill>
+                <a:latin typeface="Consolas"/>
+              </a:rPr>
+              <a:t>const saveButton = document.getElementById('save');</a:t>
+            </a:r>
+          </a:p>
+          <a:p>
+            <a:pPr>
+              <a:spcAft>
+                <a:spcPts val="0"/>
+              </a:spcAft>
+            </a:pPr>
+            <a:r>
+              <a:rPr sz="1400">
+                <a:solidFill>
+                  <a:srgbClr val="6D8C97"/>
+                </a:solidFill>
+                <a:latin typeface="Consolas"/>
+              </a:rPr>
+              <a:t>  20  </a:t>
+            </a:r>
+            <a:r>
+              <a:rPr sz="1400">
+                <a:solidFill>
+                  <a:srgbClr val="7FE0A0"/>
+                </a:solidFill>
+                <a:latin typeface="Consolas"/>
+              </a:rPr>
+              <a:t>const loadButton = document.getElementById('load');</a:t>
             </a:r>
           </a:p>
         </p:txBody>
@@ -3757,7 +4430,7 @@
                   <a:srgbClr val="1F2A37"/>
                 </a:solidFill>
               </a:rPr>
-              <a:t>Break your partner's Load</a:t>
+              <a:t>Anyone can paste anything</a:t>
             </a:r>
           </a:p>
         </p:txBody>
@@ -3790,72 +4463,931 @@
               </a:spcAft>
             </a:pPr>
             <a:r>
-              <a:rPr sz="2800">
+              <a:rPr sz="2400">
+                <a:solidFill>
+                  <a:srgbClr val="1F2A37"/>
+                </a:solidFill>
+              </a:rPr>
+              <a:t>• try/catch around parse</a:t>
+            </a:r>
+          </a:p>
+          <a:p>
+            <a:pPr>
+              <a:spcAft>
+                <a:spcPts val="1400"/>
+              </a:spcAft>
+            </a:pPr>
+            <a:r>
+              <a:rPr sz="2400">
+                <a:solidFill>
+                  <a:srgbClr val="1F2A37"/>
+                </a:solidFill>
+              </a:rPr>
+              <a:t>• Check it is actually a list</a:t>
+            </a:r>
+          </a:p>
+          <a:p>
+            <a:pPr>
+              <a:spcAft>
+                <a:spcPts val="1400"/>
+              </a:spcAft>
+            </a:pPr>
+            <a:r>
+              <a:rPr sz="2400">
+                <a:solidFill>
+                  <a:srgbClr val="1F2A37"/>
+                </a:solidFill>
+              </a:rPr>
+              <a:t>• Valid JSON is not the same as useful data</a:t>
+            </a:r>
+          </a:p>
+        </p:txBody>
+      </p:sp>
+    </p:spTree>
+  </p:cSld>
+  <p:clrMapOvr>
+    <a:masterClrMapping/>
+  </p:clrMapOvr>
+</p:sld>
+</file>
+
+<file path=ppt/slides/slide8.xml><?xml version="1.0" encoding="utf-8"?>
+<p:sld xmlns:a="http://schemas.openxmlformats.org/drawingml/2006/main" xmlns:p="http://schemas.openxmlformats.org/presentationml/2006/main" xmlns:r="http://schemas.openxmlformats.org/officeDocument/2006/relationships">
+  <p:cSld>
+    <p:bg>
+      <p:bgPr>
+        <a:solidFill>
+          <a:srgbClr val="102127"/>
+        </a:solidFill>
+        <a:effectLst/>
+      </p:bgPr>
+    </p:bg>
+    <p:spTree>
+      <p:nvGrpSpPr>
+        <p:cNvPr id="1" name=""/>
+        <p:cNvGrpSpPr/>
+        <p:nvPr/>
+      </p:nvGrpSpPr>
+      <p:grpSpPr/>
+      <p:sp>
+        <p:nvSpPr>
+          <p:cNvPr id="2" name="TextBox 1"/>
+          <p:cNvSpPr txBox="1"/>
+          <p:nvPr/>
+        </p:nvSpPr>
+        <p:spPr>
+          <a:xfrm>
+            <a:off x="502920" y="274320"/>
+            <a:ext cx="11155680" cy="731520"/>
+          </a:xfrm>
+          <a:prstGeom prst="rect">
+            <a:avLst/>
+          </a:prstGeom>
+          <a:noFill/>
+        </p:spPr>
+        <p:txBody>
+          <a:bodyPr wrap="none">
+            <a:spAutoFit/>
+          </a:bodyPr>
+          <a:lstStyle/>
+          <a:p>
+            <a:r>
+              <a:rPr sz="2600" b="1">
                 <a:solidFill>
                   <a:srgbClr val="01AEFD"/>
                 </a:solidFill>
               </a:rPr>
-              <a:t>In pairs</a:t>
-            </a:r>
-          </a:p>
-          <a:p>
-            <a:pPr>
-              <a:spcAft>
-                <a:spcPts val="1400"/>
-              </a:spcAft>
-            </a:pPr>
-            <a:r>
-              <a:rPr sz="2400">
-                <a:solidFill>
-                  <a:srgbClr val="1F2A37"/>
-                </a:solidFill>
-              </a:rPr>
-              <a:t>• Paste rubbish</a:t>
-            </a:r>
-          </a:p>
-          <a:p>
-            <a:pPr>
-              <a:spcAft>
-                <a:spcPts val="1400"/>
-              </a:spcAft>
-            </a:pPr>
-            <a:r>
-              <a:rPr sz="2400">
-                <a:solidFill>
-                  <a:srgbClr val="1F2A37"/>
-                </a:solidFill>
-              </a:rPr>
-              <a:t>• Paste half a chat</a:t>
-            </a:r>
-          </a:p>
-          <a:p>
-            <a:pPr>
-              <a:spcAft>
-                <a:spcPts val="1400"/>
-              </a:spcAft>
-            </a:pPr>
-            <a:r>
-              <a:rPr sz="2400">
-                <a:solidFill>
-                  <a:srgbClr val="1F2A37"/>
-                </a:solidFill>
-              </a:rPr>
-              <a:t>• Paste a number</a:t>
-            </a:r>
-          </a:p>
-          <a:p>
-            <a:pPr>
-              <a:spcAft>
-                <a:spcPts val="1400"/>
-              </a:spcAft>
-            </a:pPr>
-            <a:r>
-              <a:rPr sz="2400">
-                <a:solidFill>
-                  <a:srgbClr val="1F2A37"/>
-                </a:solidFill>
-              </a:rPr>
-              <a:t>• Survive everything and you win</a:t>
+              <a:t>Type this into script.js  (1 of 2)</a:t>
+            </a:r>
+          </a:p>
+        </p:txBody>
+      </p:sp>
+      <p:sp>
+        <p:nvSpPr>
+          <p:cNvPr id="3" name="TextBox 2"/>
+          <p:cNvSpPr txBox="1"/>
+          <p:nvPr/>
+        </p:nvSpPr>
+        <p:spPr>
+          <a:xfrm>
+            <a:off x="502920" y="1051560"/>
+            <a:ext cx="11155680" cy="5394960"/>
+          </a:xfrm>
+          <a:prstGeom prst="rect">
+            <a:avLst/>
+          </a:prstGeom>
+          <a:noFill/>
+        </p:spPr>
+        <p:txBody>
+          <a:bodyPr wrap="none">
+            <a:spAutoFit/>
+          </a:bodyPr>
+          <a:lstStyle/>
+          <a:p>
+            <a:pPr>
+              <a:spcAft>
+                <a:spcPts val="0"/>
+              </a:spcAft>
+            </a:pPr>
+            <a:r>
+              <a:rPr sz="1400">
+                <a:solidFill>
+                  <a:srgbClr val="6D8C97"/>
+                </a:solidFill>
+                <a:latin typeface="Consolas"/>
+              </a:rPr>
+              <a:t> 171  </a:t>
+            </a:r>
+            <a:r>
+              <a:rPr sz="1400">
+                <a:solidFill>
+                  <a:srgbClr val="7FE0A0"/>
+                </a:solidFill>
+                <a:latin typeface="Consolas"/>
+              </a:rPr>
+              <a:t> </a:t>
+            </a:r>
+          </a:p>
+          <a:p>
+            <a:pPr>
+              <a:spcAft>
+                <a:spcPts val="0"/>
+              </a:spcAft>
+            </a:pPr>
+            <a:r>
+              <a:rPr sz="1400">
+                <a:solidFill>
+                  <a:srgbClr val="6D8C97"/>
+                </a:solidFill>
+                <a:latin typeface="Consolas"/>
+              </a:rPr>
+              <a:t> 172  </a:t>
+            </a:r>
+            <a:r>
+              <a:rPr sz="1400">
+                <a:solidFill>
+                  <a:srgbClr val="7FE0A0"/>
+                </a:solidFill>
+                <a:latin typeface="Consolas"/>
+              </a:rPr>
+              <a:t>// Week 12: your chat lives in a variable, so pressing Run loses it.</a:t>
+            </a:r>
+          </a:p>
+          <a:p>
+            <a:pPr>
+              <a:spcAft>
+                <a:spcPts val="0"/>
+              </a:spcAft>
+            </a:pPr>
+            <a:r>
+              <a:rPr sz="1400">
+                <a:solidFill>
+                  <a:srgbClr val="6D8C97"/>
+                </a:solidFill>
+                <a:latin typeface="Consolas"/>
+              </a:rPr>
+              <a:t> 173  </a:t>
+            </a:r>
+            <a:r>
+              <a:rPr sz="1400">
+                <a:solidFill>
+                  <a:srgbClr val="7FE0A0"/>
+                </a:solidFill>
+                <a:latin typeface="Consolas"/>
+              </a:rPr>
+              <a:t>// JSON.stringify turns the list into text; JSON.parse turns it back.</a:t>
+            </a:r>
+          </a:p>
+          <a:p>
+            <a:pPr>
+              <a:spcAft>
+                <a:spcPts val="0"/>
+              </a:spcAft>
+            </a:pPr>
+            <a:r>
+              <a:rPr sz="1400">
+                <a:solidFill>
+                  <a:srgbClr val="6D8C97"/>
+                </a:solidFill>
+                <a:latin typeface="Consolas"/>
+              </a:rPr>
+              <a:t> 174  </a:t>
+            </a:r>
+            <a:r>
+              <a:rPr sz="1400">
+                <a:solidFill>
+                  <a:srgbClr val="7FE0A0"/>
+                </a:solidFill>
+                <a:latin typeface="Consolas"/>
+              </a:rPr>
+              <a:t>//</a:t>
+            </a:r>
+          </a:p>
+          <a:p>
+            <a:pPr>
+              <a:spcAft>
+                <a:spcPts val="0"/>
+              </a:spcAft>
+            </a:pPr>
+            <a:r>
+              <a:rPr sz="1400">
+                <a:solidFill>
+                  <a:srgbClr val="6D8C97"/>
+                </a:solidFill>
+                <a:latin typeface="Consolas"/>
+              </a:rPr>
+              <a:t> 175  </a:t>
+            </a:r>
+            <a:r>
+              <a:rPr sz="1400">
+                <a:solidFill>
+                  <a:srgbClr val="7FE0A0"/>
+                </a:solidFill>
+                <a:latin typeface="Consolas"/>
+              </a:rPr>
+              <a:t>// Note: your project runs in a locked-down frame with no localStorage,</a:t>
+            </a:r>
+          </a:p>
+          <a:p>
+            <a:pPr>
+              <a:spcAft>
+                <a:spcPts val="0"/>
+              </a:spcAft>
+            </a:pPr>
+            <a:r>
+              <a:rPr sz="1400">
+                <a:solidFill>
+                  <a:srgbClr val="6D8C97"/>
+                </a:solidFill>
+                <a:latin typeface="Consolas"/>
+              </a:rPr>
+              <a:t> 176  </a:t>
+            </a:r>
+            <a:r>
+              <a:rPr sz="1400">
+                <a:solidFill>
+                  <a:srgbClr val="7FE0A0"/>
+                </a:solidFill>
+                <a:latin typeface="Consolas"/>
+              </a:rPr>
+              <a:t>// so we hand you the text and you keep it wherever you like.</a:t>
+            </a:r>
+          </a:p>
+          <a:p>
+            <a:pPr>
+              <a:spcAft>
+                <a:spcPts val="0"/>
+              </a:spcAft>
+            </a:pPr>
+            <a:r>
+              <a:rPr sz="1400">
+                <a:solidFill>
+                  <a:srgbClr val="6D8C97"/>
+                </a:solidFill>
+                <a:latin typeface="Consolas"/>
+              </a:rPr>
+              <a:t> 177  </a:t>
+            </a:r>
+            <a:r>
+              <a:rPr sz="1400">
+                <a:solidFill>
+                  <a:srgbClr val="7FE0A0"/>
+                </a:solidFill>
+                <a:latin typeface="Consolas"/>
+              </a:rPr>
+              <a:t>saveButton.addEventListener('click', function () {</a:t>
+            </a:r>
+          </a:p>
+          <a:p>
+            <a:pPr>
+              <a:spcAft>
+                <a:spcPts val="0"/>
+              </a:spcAft>
+            </a:pPr>
+            <a:r>
+              <a:rPr sz="1400">
+                <a:solidFill>
+                  <a:srgbClr val="6D8C97"/>
+                </a:solidFill>
+                <a:latin typeface="Consolas"/>
+              </a:rPr>
+              <a:t> 178  </a:t>
+            </a:r>
+            <a:r>
+              <a:rPr sz="1400">
+                <a:solidFill>
+                  <a:srgbClr val="7FE0A0"/>
+                </a:solidFill>
+                <a:latin typeface="Consolas"/>
+              </a:rPr>
+              <a:t>  transcriptBox.value = JSON.stringify(history, null, 2);</a:t>
+            </a:r>
+          </a:p>
+          <a:p>
+            <a:pPr>
+              <a:spcAft>
+                <a:spcPts val="0"/>
+              </a:spcAft>
+            </a:pPr>
+            <a:r>
+              <a:rPr sz="1400">
+                <a:solidFill>
+                  <a:srgbClr val="6D8C97"/>
+                </a:solidFill>
+                <a:latin typeface="Consolas"/>
+              </a:rPr>
+              <a:t> 179  </a:t>
+            </a:r>
+            <a:r>
+              <a:rPr sz="1400">
+                <a:solidFill>
+                  <a:srgbClr val="7FE0A0"/>
+                </a:solidFill>
+                <a:latin typeface="Consolas"/>
+              </a:rPr>
+              <a:t>});</a:t>
+            </a:r>
+          </a:p>
+          <a:p>
+            <a:pPr>
+              <a:spcAft>
+                <a:spcPts val="0"/>
+              </a:spcAft>
+            </a:pPr>
+            <a:r>
+              <a:rPr sz="1400">
+                <a:solidFill>
+                  <a:srgbClr val="6D8C97"/>
+                </a:solidFill>
+                <a:latin typeface="Consolas"/>
+              </a:rPr>
+              <a:t> 180  </a:t>
+            </a:r>
+            <a:r>
+              <a:rPr sz="1400">
+                <a:solidFill>
+                  <a:srgbClr val="7FE0A0"/>
+                </a:solidFill>
+                <a:latin typeface="Consolas"/>
+              </a:rPr>
+              <a:t> </a:t>
+            </a:r>
+          </a:p>
+          <a:p>
+            <a:pPr>
+              <a:spcAft>
+                <a:spcPts val="0"/>
+              </a:spcAft>
+            </a:pPr>
+            <a:r>
+              <a:rPr sz="1400">
+                <a:solidFill>
+                  <a:srgbClr val="6D8C97"/>
+                </a:solidFill>
+                <a:latin typeface="Consolas"/>
+              </a:rPr>
+              <a:t> 181  </a:t>
+            </a:r>
+            <a:r>
+              <a:rPr sz="1400">
+                <a:solidFill>
+                  <a:srgbClr val="7FE0A0"/>
+                </a:solidFill>
+                <a:latin typeface="Consolas"/>
+              </a:rPr>
+              <a:t>loadButton.addEventListener('click', function () {</a:t>
+            </a:r>
+          </a:p>
+          <a:p>
+            <a:pPr>
+              <a:spcAft>
+                <a:spcPts val="0"/>
+              </a:spcAft>
+            </a:pPr>
+            <a:r>
+              <a:rPr sz="1400">
+                <a:solidFill>
+                  <a:srgbClr val="6D8C97"/>
+                </a:solidFill>
+                <a:latin typeface="Consolas"/>
+              </a:rPr>
+              <a:t> 182  </a:t>
+            </a:r>
+            <a:r>
+              <a:rPr sz="1400">
+                <a:solidFill>
+                  <a:srgbClr val="7FE0A0"/>
+                </a:solidFill>
+                <a:latin typeface="Consolas"/>
+              </a:rPr>
+              <a:t>  let loaded;</a:t>
+            </a:r>
+          </a:p>
+          <a:p>
+            <a:pPr>
+              <a:spcAft>
+                <a:spcPts val="0"/>
+              </a:spcAft>
+            </a:pPr>
+            <a:r>
+              <a:rPr sz="1400">
+                <a:solidFill>
+                  <a:srgbClr val="6D8C97"/>
+                </a:solidFill>
+                <a:latin typeface="Consolas"/>
+              </a:rPr>
+              <a:t> 183  </a:t>
+            </a:r>
+            <a:r>
+              <a:rPr sz="1400">
+                <a:solidFill>
+                  <a:srgbClr val="7FE0A0"/>
+                </a:solidFill>
+                <a:latin typeface="Consolas"/>
+              </a:rPr>
+              <a:t>  try {</a:t>
+            </a:r>
+          </a:p>
+          <a:p>
+            <a:pPr>
+              <a:spcAft>
+                <a:spcPts val="0"/>
+              </a:spcAft>
+            </a:pPr>
+            <a:r>
+              <a:rPr sz="1400">
+                <a:solidFill>
+                  <a:srgbClr val="6D8C97"/>
+                </a:solidFill>
+                <a:latin typeface="Consolas"/>
+              </a:rPr>
+              <a:t> 184  </a:t>
+            </a:r>
+            <a:r>
+              <a:rPr sz="1400">
+                <a:solidFill>
+                  <a:srgbClr val="7FE0A0"/>
+                </a:solidFill>
+                <a:latin typeface="Consolas"/>
+              </a:rPr>
+              <a:t>    loaded = JSON.parse(transcriptBox.value);</a:t>
+            </a:r>
+          </a:p>
+          <a:p>
+            <a:pPr>
+              <a:spcAft>
+                <a:spcPts val="0"/>
+              </a:spcAft>
+            </a:pPr>
+            <a:r>
+              <a:rPr sz="1400">
+                <a:solidFill>
+                  <a:srgbClr val="6D8C97"/>
+                </a:solidFill>
+                <a:latin typeface="Consolas"/>
+              </a:rPr>
+              <a:t> 185  </a:t>
+            </a:r>
+            <a:r>
+              <a:rPr sz="1400">
+                <a:solidFill>
+                  <a:srgbClr val="7FE0A0"/>
+                </a:solidFill>
+                <a:latin typeface="Consolas"/>
+              </a:rPr>
+              <a:t>  } catch (problem) {</a:t>
+            </a:r>
+          </a:p>
+        </p:txBody>
+      </p:sp>
+    </p:spTree>
+  </p:cSld>
+  <p:clrMapOvr>
+    <a:masterClrMapping/>
+  </p:clrMapOvr>
+</p:sld>
+</file>
+
+<file path=ppt/slides/slide9.xml><?xml version="1.0" encoding="utf-8"?>
+<p:sld xmlns:a="http://schemas.openxmlformats.org/drawingml/2006/main" xmlns:p="http://schemas.openxmlformats.org/presentationml/2006/main" xmlns:r="http://schemas.openxmlformats.org/officeDocument/2006/relationships">
+  <p:cSld>
+    <p:bg>
+      <p:bgPr>
+        <a:solidFill>
+          <a:srgbClr val="102127"/>
+        </a:solidFill>
+        <a:effectLst/>
+      </p:bgPr>
+    </p:bg>
+    <p:spTree>
+      <p:nvGrpSpPr>
+        <p:cNvPr id="1" name=""/>
+        <p:cNvGrpSpPr/>
+        <p:nvPr/>
+      </p:nvGrpSpPr>
+      <p:grpSpPr/>
+      <p:sp>
+        <p:nvSpPr>
+          <p:cNvPr id="2" name="TextBox 1"/>
+          <p:cNvSpPr txBox="1"/>
+          <p:nvPr/>
+        </p:nvSpPr>
+        <p:spPr>
+          <a:xfrm>
+            <a:off x="502920" y="274320"/>
+            <a:ext cx="11155680" cy="731520"/>
+          </a:xfrm>
+          <a:prstGeom prst="rect">
+            <a:avLst/>
+          </a:prstGeom>
+          <a:noFill/>
+        </p:spPr>
+        <p:txBody>
+          <a:bodyPr wrap="none">
+            <a:spAutoFit/>
+          </a:bodyPr>
+          <a:lstStyle/>
+          <a:p>
+            <a:r>
+              <a:rPr sz="2600" b="1">
+                <a:solidFill>
+                  <a:srgbClr val="01AEFD"/>
+                </a:solidFill>
+              </a:rPr>
+              <a:t>Type this into script.js  (2 of 2)</a:t>
+            </a:r>
+          </a:p>
+        </p:txBody>
+      </p:sp>
+      <p:sp>
+        <p:nvSpPr>
+          <p:cNvPr id="3" name="TextBox 2"/>
+          <p:cNvSpPr txBox="1"/>
+          <p:nvPr/>
+        </p:nvSpPr>
+        <p:spPr>
+          <a:xfrm>
+            <a:off x="502920" y="1051560"/>
+            <a:ext cx="11155680" cy="5394960"/>
+          </a:xfrm>
+          <a:prstGeom prst="rect">
+            <a:avLst/>
+          </a:prstGeom>
+          <a:noFill/>
+        </p:spPr>
+        <p:txBody>
+          <a:bodyPr wrap="none">
+            <a:spAutoFit/>
+          </a:bodyPr>
+          <a:lstStyle/>
+          <a:p>
+            <a:pPr>
+              <a:spcAft>
+                <a:spcPts val="0"/>
+              </a:spcAft>
+            </a:pPr>
+            <a:r>
+              <a:rPr sz="1400">
+                <a:solidFill>
+                  <a:srgbClr val="6D8C97"/>
+                </a:solidFill>
+                <a:latin typeface="Consolas"/>
+              </a:rPr>
+              <a:t> 186  </a:t>
+            </a:r>
+            <a:r>
+              <a:rPr sz="1400">
+                <a:solidFill>
+                  <a:srgbClr val="7FE0A0"/>
+                </a:solidFill>
+                <a:latin typeface="Consolas"/>
+              </a:rPr>
+              <a:t>    addLine('problem', 'That does not look like a saved chat.');</a:t>
+            </a:r>
+          </a:p>
+          <a:p>
+            <a:pPr>
+              <a:spcAft>
+                <a:spcPts val="0"/>
+              </a:spcAft>
+            </a:pPr>
+            <a:r>
+              <a:rPr sz="1400">
+                <a:solidFill>
+                  <a:srgbClr val="6D8C97"/>
+                </a:solidFill>
+                <a:latin typeface="Consolas"/>
+              </a:rPr>
+              <a:t> 187  </a:t>
+            </a:r>
+            <a:r>
+              <a:rPr sz="1400">
+                <a:solidFill>
+                  <a:srgbClr val="7FE0A0"/>
+                </a:solidFill>
+                <a:latin typeface="Consolas"/>
+              </a:rPr>
+              <a:t>    return;</a:t>
+            </a:r>
+          </a:p>
+          <a:p>
+            <a:pPr>
+              <a:spcAft>
+                <a:spcPts val="0"/>
+              </a:spcAft>
+            </a:pPr>
+            <a:r>
+              <a:rPr sz="1400">
+                <a:solidFill>
+                  <a:srgbClr val="6D8C97"/>
+                </a:solidFill>
+                <a:latin typeface="Consolas"/>
+              </a:rPr>
+              <a:t> 188  </a:t>
+            </a:r>
+            <a:r>
+              <a:rPr sz="1400">
+                <a:solidFill>
+                  <a:srgbClr val="7FE0A0"/>
+                </a:solidFill>
+                <a:latin typeface="Consolas"/>
+              </a:rPr>
+              <a:t>  }</a:t>
+            </a:r>
+          </a:p>
+          <a:p>
+            <a:pPr>
+              <a:spcAft>
+                <a:spcPts val="0"/>
+              </a:spcAft>
+            </a:pPr>
+            <a:r>
+              <a:rPr sz="1400">
+                <a:solidFill>
+                  <a:srgbClr val="6D8C97"/>
+                </a:solidFill>
+                <a:latin typeface="Consolas"/>
+              </a:rPr>
+              <a:t> 189  </a:t>
+            </a:r>
+            <a:r>
+              <a:rPr sz="1400">
+                <a:solidFill>
+                  <a:srgbClr val="7FE0A0"/>
+                </a:solidFill>
+                <a:latin typeface="Consolas"/>
+              </a:rPr>
+              <a:t>  if (!Array.isArray(loaded)) {</a:t>
+            </a:r>
+          </a:p>
+          <a:p>
+            <a:pPr>
+              <a:spcAft>
+                <a:spcPts val="0"/>
+              </a:spcAft>
+            </a:pPr>
+            <a:r>
+              <a:rPr sz="1400">
+                <a:solidFill>
+                  <a:srgbClr val="6D8C97"/>
+                </a:solidFill>
+                <a:latin typeface="Consolas"/>
+              </a:rPr>
+              <a:t> 190  </a:t>
+            </a:r>
+            <a:r>
+              <a:rPr sz="1400">
+                <a:solidFill>
+                  <a:srgbClr val="7FE0A0"/>
+                </a:solidFill>
+                <a:latin typeface="Consolas"/>
+              </a:rPr>
+              <a:t>    addLine('problem', 'A saved chat should be a list of messages.');</a:t>
+            </a:r>
+          </a:p>
+          <a:p>
+            <a:pPr>
+              <a:spcAft>
+                <a:spcPts val="0"/>
+              </a:spcAft>
+            </a:pPr>
+            <a:r>
+              <a:rPr sz="1400">
+                <a:solidFill>
+                  <a:srgbClr val="6D8C97"/>
+                </a:solidFill>
+                <a:latin typeface="Consolas"/>
+              </a:rPr>
+              <a:t> 191  </a:t>
+            </a:r>
+            <a:r>
+              <a:rPr sz="1400">
+                <a:solidFill>
+                  <a:srgbClr val="7FE0A0"/>
+                </a:solidFill>
+                <a:latin typeface="Consolas"/>
+              </a:rPr>
+              <a:t>    return;</a:t>
+            </a:r>
+          </a:p>
+          <a:p>
+            <a:pPr>
+              <a:spcAft>
+                <a:spcPts val="0"/>
+              </a:spcAft>
+            </a:pPr>
+            <a:r>
+              <a:rPr sz="1400">
+                <a:solidFill>
+                  <a:srgbClr val="6D8C97"/>
+                </a:solidFill>
+                <a:latin typeface="Consolas"/>
+              </a:rPr>
+              <a:t> 192  </a:t>
+            </a:r>
+            <a:r>
+              <a:rPr sz="1400">
+                <a:solidFill>
+                  <a:srgbClr val="7FE0A0"/>
+                </a:solidFill>
+                <a:latin typeface="Consolas"/>
+              </a:rPr>
+              <a:t>  }</a:t>
+            </a:r>
+          </a:p>
+          <a:p>
+            <a:pPr>
+              <a:spcAft>
+                <a:spcPts val="0"/>
+              </a:spcAft>
+            </a:pPr>
+            <a:r>
+              <a:rPr sz="1400">
+                <a:solidFill>
+                  <a:srgbClr val="6D8C97"/>
+                </a:solidFill>
+                <a:latin typeface="Consolas"/>
+              </a:rPr>
+              <a:t> 193  </a:t>
+            </a:r>
+            <a:r>
+              <a:rPr sz="1400">
+                <a:solidFill>
+                  <a:srgbClr val="7FE0A0"/>
+                </a:solidFill>
+                <a:latin typeface="Consolas"/>
+              </a:rPr>
+              <a:t>  history.length = 0;      // empty the list without making a new one</a:t>
+            </a:r>
+          </a:p>
+          <a:p>
+            <a:pPr>
+              <a:spcAft>
+                <a:spcPts val="0"/>
+              </a:spcAft>
+            </a:pPr>
+            <a:r>
+              <a:rPr sz="1400">
+                <a:solidFill>
+                  <a:srgbClr val="6D8C97"/>
+                </a:solidFill>
+                <a:latin typeface="Consolas"/>
+              </a:rPr>
+              <a:t> 194  </a:t>
+            </a:r>
+            <a:r>
+              <a:rPr sz="1400">
+                <a:solidFill>
+                  <a:srgbClr val="7FE0A0"/>
+                </a:solidFill>
+                <a:latin typeface="Consolas"/>
+              </a:rPr>
+              <a:t>  chat.textContent = '';   // clear the screen too</a:t>
+            </a:r>
+          </a:p>
+          <a:p>
+            <a:pPr>
+              <a:spcAft>
+                <a:spcPts val="0"/>
+              </a:spcAft>
+            </a:pPr>
+            <a:r>
+              <a:rPr sz="1400">
+                <a:solidFill>
+                  <a:srgbClr val="6D8C97"/>
+                </a:solidFill>
+                <a:latin typeface="Consolas"/>
+              </a:rPr>
+              <a:t> 195  </a:t>
+            </a:r>
+            <a:r>
+              <a:rPr sz="1400">
+                <a:solidFill>
+                  <a:srgbClr val="7FE0A0"/>
+                </a:solidFill>
+                <a:latin typeface="Consolas"/>
+              </a:rPr>
+              <a:t>  for (const message of loaded) {</a:t>
+            </a:r>
+          </a:p>
+          <a:p>
+            <a:pPr>
+              <a:spcAft>
+                <a:spcPts val="0"/>
+              </a:spcAft>
+            </a:pPr>
+            <a:r>
+              <a:rPr sz="1400">
+                <a:solidFill>
+                  <a:srgbClr val="6D8C97"/>
+                </a:solidFill>
+                <a:latin typeface="Consolas"/>
+              </a:rPr>
+              <a:t> 196  </a:t>
+            </a:r>
+            <a:r>
+              <a:rPr sz="1400">
+                <a:solidFill>
+                  <a:srgbClr val="7FE0A0"/>
+                </a:solidFill>
+                <a:latin typeface="Consolas"/>
+              </a:rPr>
+              <a:t>    history.push(message);</a:t>
+            </a:r>
+          </a:p>
+          <a:p>
+            <a:pPr>
+              <a:spcAft>
+                <a:spcPts val="0"/>
+              </a:spcAft>
+            </a:pPr>
+            <a:r>
+              <a:rPr sz="1400">
+                <a:solidFill>
+                  <a:srgbClr val="6D8C97"/>
+                </a:solidFill>
+                <a:latin typeface="Consolas"/>
+              </a:rPr>
+              <a:t> 197  </a:t>
+            </a:r>
+            <a:r>
+              <a:rPr sz="1400">
+                <a:solidFill>
+                  <a:srgbClr val="7FE0A0"/>
+                </a:solidFill>
+                <a:latin typeface="Consolas"/>
+              </a:rPr>
+              <a:t>    addLine(message.role === 'user' ? 'you' : 'bot', message.content);</a:t>
+            </a:r>
+          </a:p>
+          <a:p>
+            <a:pPr>
+              <a:spcAft>
+                <a:spcPts val="0"/>
+              </a:spcAft>
+            </a:pPr>
+            <a:r>
+              <a:rPr sz="1400">
+                <a:solidFill>
+                  <a:srgbClr val="6D8C97"/>
+                </a:solidFill>
+                <a:latin typeface="Consolas"/>
+              </a:rPr>
+              <a:t> 198  </a:t>
+            </a:r>
+            <a:r>
+              <a:rPr sz="1400">
+                <a:solidFill>
+                  <a:srgbClr val="7FE0A0"/>
+                </a:solidFill>
+                <a:latin typeface="Consolas"/>
+              </a:rPr>
+              <a:t>  }</a:t>
+            </a:r>
+          </a:p>
+          <a:p>
+            <a:pPr>
+              <a:spcAft>
+                <a:spcPts val="0"/>
+              </a:spcAft>
+            </a:pPr>
+            <a:r>
+              <a:rPr sz="1400">
+                <a:solidFill>
+                  <a:srgbClr val="6D8C97"/>
+                </a:solidFill>
+                <a:latin typeface="Consolas"/>
+              </a:rPr>
+              <a:t> 199  </a:t>
+            </a:r>
+            <a:r>
+              <a:rPr sz="1400">
+                <a:solidFill>
+                  <a:srgbClr val="7FE0A0"/>
+                </a:solidFill>
+                <a:latin typeface="Consolas"/>
+              </a:rPr>
+              <a:t>});</a:t>
             </a:r>
           </a:p>
         </p:txBody>

--- a/ai101/slides/week-12.pptx
+++ b/ai101/slides/week-12.pptx
@@ -3845,7 +3845,7 @@
                 </a:solidFill>
                 <a:latin typeface="Consolas"/>
               </a:rPr>
-              <a:t>  26  </a:t>
+              <a:t>  29  </a:t>
             </a:r>
             <a:r>
               <a:rPr sz="1700">
@@ -3870,7 +3870,7 @@
                 </a:solidFill>
                 <a:latin typeface="Consolas"/>
               </a:rPr>
-              <a:t>  27  </a:t>
+              <a:t>  30  </a:t>
             </a:r>
             <a:r>
               <a:rPr sz="1700">
@@ -3895,7 +3895,7 @@
                 </a:solidFill>
                 <a:latin typeface="Consolas"/>
               </a:rPr>
-              <a:t>  28  </a:t>
+              <a:t>  31  </a:t>
             </a:r>
             <a:r>
               <a:rPr sz="1700">
@@ -3920,7 +3920,7 @@
                 </a:solidFill>
                 <a:latin typeface="Consolas"/>
               </a:rPr>
-              <a:t>  29  </a:t>
+              <a:t>  32  </a:t>
             </a:r>
             <a:r>
               <a:rPr sz="1700">
@@ -3945,7 +3945,7 @@
                 </a:solidFill>
                 <a:latin typeface="Consolas"/>
               </a:rPr>
-              <a:t>  30  </a:t>
+              <a:t>  33  </a:t>
             </a:r>
             <a:r>
               <a:rPr sz="1700">
@@ -3970,7 +3970,7 @@
                 </a:solidFill>
                 <a:latin typeface="Consolas"/>
               </a:rPr>
-              <a:t>  31  </a:t>
+              <a:t>  34  </a:t>
             </a:r>
             <a:r>
               <a:rPr sz="1700">
@@ -4077,7 +4077,7 @@
                 </a:solidFill>
                 <a:latin typeface="Consolas"/>
               </a:rPr>
-              <a:t>   8  </a:t>
+              <a:t>  11  </a:t>
             </a:r>
             <a:r>
               <a:rPr sz="1400">
@@ -4102,7 +4102,7 @@
                 </a:solidFill>
                 <a:latin typeface="Consolas"/>
               </a:rPr>
-              <a:t>   9  </a:t>
+              <a:t>  12  </a:t>
             </a:r>
             <a:r>
               <a:rPr sz="1400">
@@ -4127,7 +4127,7 @@
                 </a:solidFill>
                 <a:latin typeface="Consolas"/>
               </a:rPr>
-              <a:t>  10  </a:t>
+              <a:t>  13  </a:t>
             </a:r>
             <a:r>
               <a:rPr sz="1400">
@@ -4152,7 +4152,7 @@
                 </a:solidFill>
                 <a:latin typeface="Consolas"/>
               </a:rPr>
-              <a:t>  11  </a:t>
+              <a:t>  14  </a:t>
             </a:r>
             <a:r>
               <a:rPr sz="1400">
@@ -4177,7 +4177,7 @@
                 </a:solidFill>
                 <a:latin typeface="Consolas"/>
               </a:rPr>
-              <a:t>  12  </a:t>
+              <a:t>  15  </a:t>
             </a:r>
             <a:r>
               <a:rPr sz="1400">
@@ -4202,7 +4202,7 @@
                 </a:solidFill>
                 <a:latin typeface="Consolas"/>
               </a:rPr>
-              <a:t>  13  </a:t>
+              <a:t>  16  </a:t>
             </a:r>
             <a:r>
               <a:rPr sz="1400">
@@ -4227,7 +4227,7 @@
                 </a:solidFill>
                 <a:latin typeface="Consolas"/>
               </a:rPr>
-              <a:t>  14  </a:t>
+              <a:t>  17  </a:t>
             </a:r>
             <a:r>
               <a:rPr sz="1400">
@@ -4252,7 +4252,7 @@
                 </a:solidFill>
                 <a:latin typeface="Consolas"/>
               </a:rPr>
-              <a:t>  15  </a:t>
+              <a:t>  18  </a:t>
             </a:r>
             <a:r>
               <a:rPr sz="1400">
@@ -4277,7 +4277,7 @@
                 </a:solidFill>
                 <a:latin typeface="Consolas"/>
               </a:rPr>
-              <a:t>  16  </a:t>
+              <a:t>  19  </a:t>
             </a:r>
             <a:r>
               <a:rPr sz="1400">
@@ -4302,7 +4302,7 @@
                 </a:solidFill>
                 <a:latin typeface="Consolas"/>
               </a:rPr>
-              <a:t>  17  </a:t>
+              <a:t>  20  </a:t>
             </a:r>
             <a:r>
               <a:rPr sz="1400">
@@ -4327,7 +4327,7 @@
                 </a:solidFill>
                 <a:latin typeface="Consolas"/>
               </a:rPr>
-              <a:t>  18  </a:t>
+              <a:t>  21  </a:t>
             </a:r>
             <a:r>
               <a:rPr sz="1400">
@@ -4352,7 +4352,7 @@
                 </a:solidFill>
                 <a:latin typeface="Consolas"/>
               </a:rPr>
-              <a:t>  19  </a:t>
+              <a:t>  22  </a:t>
             </a:r>
             <a:r>
               <a:rPr sz="1400">
@@ -4377,7 +4377,7 @@
                 </a:solidFill>
                 <a:latin typeface="Consolas"/>
               </a:rPr>
-              <a:t>  20  </a:t>
+              <a:t>  23  </a:t>
             </a:r>
             <a:r>
               <a:rPr sz="1400">
@@ -4596,7 +4596,7 @@
                 </a:solidFill>
                 <a:latin typeface="Consolas"/>
               </a:rPr>
-              <a:t> 171  </a:t>
+              <a:t> 174  </a:t>
             </a:r>
             <a:r>
               <a:rPr sz="1400">
@@ -4621,7 +4621,7 @@
                 </a:solidFill>
                 <a:latin typeface="Consolas"/>
               </a:rPr>
-              <a:t> 172  </a:t>
+              <a:t> 175  </a:t>
             </a:r>
             <a:r>
               <a:rPr sz="1400">
@@ -4646,7 +4646,7 @@
                 </a:solidFill>
                 <a:latin typeface="Consolas"/>
               </a:rPr>
-              <a:t> 173  </a:t>
+              <a:t> 176  </a:t>
             </a:r>
             <a:r>
               <a:rPr sz="1400">
@@ -4671,7 +4671,7 @@
                 </a:solidFill>
                 <a:latin typeface="Consolas"/>
               </a:rPr>
-              <a:t> 174  </a:t>
+              <a:t> 177  </a:t>
             </a:r>
             <a:r>
               <a:rPr sz="1400">
@@ -4696,7 +4696,7 @@
                 </a:solidFill>
                 <a:latin typeface="Consolas"/>
               </a:rPr>
-              <a:t> 175  </a:t>
+              <a:t> 178  </a:t>
             </a:r>
             <a:r>
               <a:rPr sz="1400">
@@ -4721,7 +4721,7 @@
                 </a:solidFill>
                 <a:latin typeface="Consolas"/>
               </a:rPr>
-              <a:t> 176  </a:t>
+              <a:t> 179  </a:t>
             </a:r>
             <a:r>
               <a:rPr sz="1400">
@@ -4746,7 +4746,7 @@
                 </a:solidFill>
                 <a:latin typeface="Consolas"/>
               </a:rPr>
-              <a:t> 177  </a:t>
+              <a:t> 180  </a:t>
             </a:r>
             <a:r>
               <a:rPr sz="1400">
@@ -4771,7 +4771,7 @@
                 </a:solidFill>
                 <a:latin typeface="Consolas"/>
               </a:rPr>
-              <a:t> 178  </a:t>
+              <a:t> 181  </a:t>
             </a:r>
             <a:r>
               <a:rPr sz="1400">
@@ -4796,7 +4796,7 @@
                 </a:solidFill>
                 <a:latin typeface="Consolas"/>
               </a:rPr>
-              <a:t> 179  </a:t>
+              <a:t> 182  </a:t>
             </a:r>
             <a:r>
               <a:rPr sz="1400">
@@ -4821,7 +4821,7 @@
                 </a:solidFill>
                 <a:latin typeface="Consolas"/>
               </a:rPr>
-              <a:t> 180  </a:t>
+              <a:t> 183  </a:t>
             </a:r>
             <a:r>
               <a:rPr sz="1400">
@@ -4846,7 +4846,7 @@
                 </a:solidFill>
                 <a:latin typeface="Consolas"/>
               </a:rPr>
-              <a:t> 181  </a:t>
+              <a:t> 184  </a:t>
             </a:r>
             <a:r>
               <a:rPr sz="1400">
@@ -4871,7 +4871,7 @@
                 </a:solidFill>
                 <a:latin typeface="Consolas"/>
               </a:rPr>
-              <a:t> 182  </a:t>
+              <a:t> 185  </a:t>
             </a:r>
             <a:r>
               <a:rPr sz="1400">
@@ -4896,7 +4896,7 @@
                 </a:solidFill>
                 <a:latin typeface="Consolas"/>
               </a:rPr>
-              <a:t> 183  </a:t>
+              <a:t> 186  </a:t>
             </a:r>
             <a:r>
               <a:rPr sz="1400">
@@ -4921,7 +4921,7 @@
                 </a:solidFill>
                 <a:latin typeface="Consolas"/>
               </a:rPr>
-              <a:t> 184  </a:t>
+              <a:t> 187  </a:t>
             </a:r>
             <a:r>
               <a:rPr sz="1400">
@@ -4946,7 +4946,7 @@
                 </a:solidFill>
                 <a:latin typeface="Consolas"/>
               </a:rPr>
-              <a:t> 185  </a:t>
+              <a:t> 188  </a:t>
             </a:r>
             <a:r>
               <a:rPr sz="1400">
@@ -5053,7 +5053,7 @@
                 </a:solidFill>
                 <a:latin typeface="Consolas"/>
               </a:rPr>
-              <a:t> 186  </a:t>
+              <a:t> 189  </a:t>
             </a:r>
             <a:r>
               <a:rPr sz="1400">
@@ -5078,7 +5078,7 @@
                 </a:solidFill>
                 <a:latin typeface="Consolas"/>
               </a:rPr>
-              <a:t> 187  </a:t>
+              <a:t> 190  </a:t>
             </a:r>
             <a:r>
               <a:rPr sz="1400">
@@ -5103,7 +5103,7 @@
                 </a:solidFill>
                 <a:latin typeface="Consolas"/>
               </a:rPr>
-              <a:t> 188  </a:t>
+              <a:t> 191  </a:t>
             </a:r>
             <a:r>
               <a:rPr sz="1400">
@@ -5128,7 +5128,7 @@
                 </a:solidFill>
                 <a:latin typeface="Consolas"/>
               </a:rPr>
-              <a:t> 189  </a:t>
+              <a:t> 192  </a:t>
             </a:r>
             <a:r>
               <a:rPr sz="1400">
@@ -5153,7 +5153,7 @@
                 </a:solidFill>
                 <a:latin typeface="Consolas"/>
               </a:rPr>
-              <a:t> 190  </a:t>
+              <a:t> 193  </a:t>
             </a:r>
             <a:r>
               <a:rPr sz="1400">
@@ -5178,7 +5178,7 @@
                 </a:solidFill>
                 <a:latin typeface="Consolas"/>
               </a:rPr>
-              <a:t> 191  </a:t>
+              <a:t> 194  </a:t>
             </a:r>
             <a:r>
               <a:rPr sz="1400">
@@ -5203,7 +5203,7 @@
                 </a:solidFill>
                 <a:latin typeface="Consolas"/>
               </a:rPr>
-              <a:t> 192  </a:t>
+              <a:t> 195  </a:t>
             </a:r>
             <a:r>
               <a:rPr sz="1400">
@@ -5228,7 +5228,7 @@
                 </a:solidFill>
                 <a:latin typeface="Consolas"/>
               </a:rPr>
-              <a:t> 193  </a:t>
+              <a:t> 196  </a:t>
             </a:r>
             <a:r>
               <a:rPr sz="1400">
@@ -5253,7 +5253,7 @@
                 </a:solidFill>
                 <a:latin typeface="Consolas"/>
               </a:rPr>
-              <a:t> 194  </a:t>
+              <a:t> 197  </a:t>
             </a:r>
             <a:r>
               <a:rPr sz="1400">
@@ -5278,7 +5278,7 @@
                 </a:solidFill>
                 <a:latin typeface="Consolas"/>
               </a:rPr>
-              <a:t> 195  </a:t>
+              <a:t> 198  </a:t>
             </a:r>
             <a:r>
               <a:rPr sz="1400">
@@ -5303,7 +5303,7 @@
                 </a:solidFill>
                 <a:latin typeface="Consolas"/>
               </a:rPr>
-              <a:t> 196  </a:t>
+              <a:t> 199  </a:t>
             </a:r>
             <a:r>
               <a:rPr sz="1400">
@@ -5328,7 +5328,7 @@
                 </a:solidFill>
                 <a:latin typeface="Consolas"/>
               </a:rPr>
-              <a:t> 197  </a:t>
+              <a:t> 200  </a:t>
             </a:r>
             <a:r>
               <a:rPr sz="1400">
@@ -5353,7 +5353,7 @@
                 </a:solidFill>
                 <a:latin typeface="Consolas"/>
               </a:rPr>
-              <a:t> 198  </a:t>
+              <a:t> 201  </a:t>
             </a:r>
             <a:r>
               <a:rPr sz="1400">
@@ -5378,7 +5378,7 @@
                 </a:solidFill>
                 <a:latin typeface="Consolas"/>
               </a:rPr>
-              <a:t> 199  </a:t>
+              <a:t> 202  </a:t>
             </a:r>
             <a:r>
               <a:rPr sz="1400">

--- a/ai101/slides/week-12.pptx
+++ b/ai101/slides/week-12.pptx
@@ -16,6 +16,7 @@
     <p:sldId id="264" r:id="rId15"/>
     <p:sldId id="265" r:id="rId16"/>
     <p:sldId id="266" r:id="rId17"/>
+    <p:sldId id="267" r:id="rId18"/>
   </p:sldIdLst>
   <p:sldSz cx="12191695" cy="6858000" type="screen4x3"/>
   <p:notesSz cx="6858000" cy="9144000"/>
@@ -3173,6 +3174,263 @@
 <file path=ppt/slides/slide10.xml><?xml version="1.0" encoding="utf-8"?>
 <p:sld xmlns:a="http://schemas.openxmlformats.org/drawingml/2006/main" xmlns:p="http://schemas.openxmlformats.org/presentationml/2006/main" xmlns:r="http://schemas.openxmlformats.org/officeDocument/2006/relationships">
   <p:cSld>
+    <p:bg>
+      <p:bgPr>
+        <a:solidFill>
+          <a:srgbClr val="102127"/>
+        </a:solidFill>
+        <a:effectLst/>
+      </p:bgPr>
+    </p:bg>
+    <p:spTree>
+      <p:nvGrpSpPr>
+        <p:cNvPr id="1" name=""/>
+        <p:cNvGrpSpPr/>
+        <p:nvPr/>
+      </p:nvGrpSpPr>
+      <p:grpSpPr/>
+      <p:sp>
+        <p:nvSpPr>
+          <p:cNvPr id="2" name="TextBox 1"/>
+          <p:cNvSpPr txBox="1"/>
+          <p:nvPr/>
+        </p:nvSpPr>
+        <p:spPr>
+          <a:xfrm>
+            <a:off x="502920" y="274320"/>
+            <a:ext cx="11155680" cy="731520"/>
+          </a:xfrm>
+          <a:prstGeom prst="rect">
+            <a:avLst/>
+          </a:prstGeom>
+          <a:noFill/>
+        </p:spPr>
+        <p:txBody>
+          <a:bodyPr wrap="none">
+            <a:spAutoFit/>
+          </a:bodyPr>
+          <a:lstStyle/>
+          <a:p>
+            <a:r>
+              <a:rPr sz="2600" b="1">
+                <a:solidFill>
+                  <a:srgbClr val="01AEFD"/>
+                </a:solidFill>
+              </a:rPr>
+              <a:t>Type this into script.js  (3 of 3)</a:t>
+            </a:r>
+          </a:p>
+        </p:txBody>
+      </p:sp>
+      <p:sp>
+        <p:nvSpPr>
+          <p:cNvPr id="3" name="TextBox 2"/>
+          <p:cNvSpPr txBox="1"/>
+          <p:nvPr/>
+        </p:nvSpPr>
+        <p:spPr>
+          <a:xfrm>
+            <a:off x="502920" y="1051560"/>
+            <a:ext cx="11155680" cy="5394960"/>
+          </a:xfrm>
+          <a:prstGeom prst="rect">
+            <a:avLst/>
+          </a:prstGeom>
+          <a:noFill/>
+        </p:spPr>
+        <p:txBody>
+          <a:bodyPr wrap="none">
+            <a:spAutoFit/>
+          </a:bodyPr>
+          <a:lstStyle/>
+          <a:p>
+            <a:pPr>
+              <a:spcAft>
+                <a:spcPts val="0"/>
+              </a:spcAft>
+            </a:pPr>
+            <a:r>
+              <a:rPr sz="1700">
+                <a:solidFill>
+                  <a:srgbClr val="6D8C97"/>
+                </a:solidFill>
+                <a:latin typeface="Consolas"/>
+              </a:rPr>
+              <a:t> 217  </a:t>
+            </a:r>
+            <a:r>
+              <a:rPr sz="1700">
+                <a:solidFill>
+                  <a:srgbClr val="7FE0A0"/>
+                </a:solidFill>
+                <a:latin typeface="Consolas"/>
+              </a:rPr>
+              <a:t>  history.length = 0;      // empty the list without making a new one</a:t>
+            </a:r>
+          </a:p>
+          <a:p>
+            <a:pPr>
+              <a:spcAft>
+                <a:spcPts val="0"/>
+              </a:spcAft>
+            </a:pPr>
+            <a:r>
+              <a:rPr sz="1700">
+                <a:solidFill>
+                  <a:srgbClr val="6D8C97"/>
+                </a:solidFill>
+                <a:latin typeface="Consolas"/>
+              </a:rPr>
+              <a:t> 218  </a:t>
+            </a:r>
+            <a:r>
+              <a:rPr sz="1700">
+                <a:solidFill>
+                  <a:srgbClr val="7FE0A0"/>
+                </a:solidFill>
+                <a:latin typeface="Consolas"/>
+              </a:rPr>
+              <a:t>  chat.textContent = '';   // clear the screen too</a:t>
+            </a:r>
+          </a:p>
+          <a:p>
+            <a:pPr>
+              <a:spcAft>
+                <a:spcPts val="0"/>
+              </a:spcAft>
+            </a:pPr>
+            <a:r>
+              <a:rPr sz="1700">
+                <a:solidFill>
+                  <a:srgbClr val="6D8C97"/>
+                </a:solidFill>
+                <a:latin typeface="Consolas"/>
+              </a:rPr>
+              <a:t> 219  </a:t>
+            </a:r>
+            <a:r>
+              <a:rPr sz="1700">
+                <a:solidFill>
+                  <a:srgbClr val="7FE0A0"/>
+                </a:solidFill>
+                <a:latin typeface="Consolas"/>
+              </a:rPr>
+              <a:t>  for (const message of loaded) {</a:t>
+            </a:r>
+          </a:p>
+          <a:p>
+            <a:pPr>
+              <a:spcAft>
+                <a:spcPts val="0"/>
+              </a:spcAft>
+            </a:pPr>
+            <a:r>
+              <a:rPr sz="1700">
+                <a:solidFill>
+                  <a:srgbClr val="6D8C97"/>
+                </a:solidFill>
+                <a:latin typeface="Consolas"/>
+              </a:rPr>
+              <a:t> 220  </a:t>
+            </a:r>
+            <a:r>
+              <a:rPr sz="1700">
+                <a:solidFill>
+                  <a:srgbClr val="7FE0A0"/>
+                </a:solidFill>
+                <a:latin typeface="Consolas"/>
+              </a:rPr>
+              <a:t>    history.push(message);</a:t>
+            </a:r>
+          </a:p>
+          <a:p>
+            <a:pPr>
+              <a:spcAft>
+                <a:spcPts val="0"/>
+              </a:spcAft>
+            </a:pPr>
+            <a:r>
+              <a:rPr sz="1700">
+                <a:solidFill>
+                  <a:srgbClr val="6D8C97"/>
+                </a:solidFill>
+                <a:latin typeface="Consolas"/>
+              </a:rPr>
+              <a:t> 221  </a:t>
+            </a:r>
+            <a:r>
+              <a:rPr sz="1700">
+                <a:solidFill>
+                  <a:srgbClr val="7FE0A0"/>
+                </a:solidFill>
+                <a:latin typeface="Consolas"/>
+              </a:rPr>
+              <a:t>    addLine(message.role === 'user' ? 'you' : 'bot', message.content);</a:t>
+            </a:r>
+          </a:p>
+          <a:p>
+            <a:pPr>
+              <a:spcAft>
+                <a:spcPts val="0"/>
+              </a:spcAft>
+            </a:pPr>
+            <a:r>
+              <a:rPr sz="1700">
+                <a:solidFill>
+                  <a:srgbClr val="6D8C97"/>
+                </a:solidFill>
+                <a:latin typeface="Consolas"/>
+              </a:rPr>
+              <a:t> 222  </a:t>
+            </a:r>
+            <a:r>
+              <a:rPr sz="1700">
+                <a:solidFill>
+                  <a:srgbClr val="7FE0A0"/>
+                </a:solidFill>
+                <a:latin typeface="Consolas"/>
+              </a:rPr>
+              <a:t>  }</a:t>
+            </a:r>
+          </a:p>
+          <a:p>
+            <a:pPr>
+              <a:spcAft>
+                <a:spcPts val="0"/>
+              </a:spcAft>
+            </a:pPr>
+            <a:r>
+              <a:rPr sz="1700">
+                <a:solidFill>
+                  <a:srgbClr val="6D8C97"/>
+                </a:solidFill>
+                <a:latin typeface="Consolas"/>
+              </a:rPr>
+              <a:t> 223  </a:t>
+            </a:r>
+            <a:r>
+              <a:rPr sz="1700">
+                <a:solidFill>
+                  <a:srgbClr val="7FE0A0"/>
+                </a:solidFill>
+                <a:latin typeface="Consolas"/>
+              </a:rPr>
+              <a:t>});</a:t>
+            </a:r>
+          </a:p>
+        </p:txBody>
+      </p:sp>
+    </p:spTree>
+  </p:cSld>
+  <p:clrMapOvr>
+    <a:masterClrMapping/>
+  </p:clrMapOvr>
+</p:sld>
+</file>
+
+<file path=ppt/slides/slide11.xml><?xml version="1.0" encoding="utf-8"?>
+<p:sld xmlns:a="http://schemas.openxmlformats.org/drawingml/2006/main" xmlns:p="http://schemas.openxmlformats.org/presentationml/2006/main" xmlns:r="http://schemas.openxmlformats.org/officeDocument/2006/relationships">
+  <p:cSld>
     <p:spTree>
       <p:nvGrpSpPr>
         <p:cNvPr id="1" name=""/>
@@ -3282,7 +3540,7 @@
 </p:sld>
 </file>
 
-<file path=ppt/slides/slide11.xml><?xml version="1.0" encoding="utf-8"?>
+<file path=ppt/slides/slide12.xml><?xml version="1.0" encoding="utf-8"?>
 <p:sld xmlns:a="http://schemas.openxmlformats.org/drawingml/2006/main" xmlns:p="http://schemas.openxmlformats.org/presentationml/2006/main" xmlns:r="http://schemas.openxmlformats.org/officeDocument/2006/relationships">
   <p:cSld>
     <p:spTree>
@@ -4077,7 +4335,7 @@
                 </a:solidFill>
                 <a:latin typeface="Consolas"/>
               </a:rPr>
-              <a:t>  11  </a:t>
+              <a:t>  16  </a:t>
             </a:r>
             <a:r>
               <a:rPr sz="1400">
@@ -4102,7 +4360,7 @@
                 </a:solidFill>
                 <a:latin typeface="Consolas"/>
               </a:rPr>
-              <a:t>  12  </a:t>
+              <a:t>  17  </a:t>
             </a:r>
             <a:r>
               <a:rPr sz="1400">
@@ -4127,7 +4385,7 @@
                 </a:solidFill>
                 <a:latin typeface="Consolas"/>
               </a:rPr>
-              <a:t>  13  </a:t>
+              <a:t>  18  </a:t>
             </a:r>
             <a:r>
               <a:rPr sz="1400">
@@ -4152,7 +4410,7 @@
                 </a:solidFill>
                 <a:latin typeface="Consolas"/>
               </a:rPr>
-              <a:t>  14  </a:t>
+              <a:t>  19  </a:t>
             </a:r>
             <a:r>
               <a:rPr sz="1400">
@@ -4177,7 +4435,7 @@
                 </a:solidFill>
                 <a:latin typeface="Consolas"/>
               </a:rPr>
-              <a:t>  15  </a:t>
+              <a:t>  20  </a:t>
             </a:r>
             <a:r>
               <a:rPr sz="1400">
@@ -4202,7 +4460,7 @@
                 </a:solidFill>
                 <a:latin typeface="Consolas"/>
               </a:rPr>
-              <a:t>  16  </a:t>
+              <a:t>  21  </a:t>
             </a:r>
             <a:r>
               <a:rPr sz="1400">
@@ -4227,7 +4485,7 @@
                 </a:solidFill>
                 <a:latin typeface="Consolas"/>
               </a:rPr>
-              <a:t>  17  </a:t>
+              <a:t>  22  </a:t>
             </a:r>
             <a:r>
               <a:rPr sz="1400">
@@ -4252,7 +4510,7 @@
                 </a:solidFill>
                 <a:latin typeface="Consolas"/>
               </a:rPr>
-              <a:t>  18  </a:t>
+              <a:t>  23  </a:t>
             </a:r>
             <a:r>
               <a:rPr sz="1400">
@@ -4277,7 +4535,7 @@
                 </a:solidFill>
                 <a:latin typeface="Consolas"/>
               </a:rPr>
-              <a:t>  19  </a:t>
+              <a:t>  24  </a:t>
             </a:r>
             <a:r>
               <a:rPr sz="1400">
@@ -4302,7 +4560,7 @@
                 </a:solidFill>
                 <a:latin typeface="Consolas"/>
               </a:rPr>
-              <a:t>  20  </a:t>
+              <a:t>  25  </a:t>
             </a:r>
             <a:r>
               <a:rPr sz="1400">
@@ -4327,7 +4585,7 @@
                 </a:solidFill>
                 <a:latin typeface="Consolas"/>
               </a:rPr>
-              <a:t>  21  </a:t>
+              <a:t>  26  </a:t>
             </a:r>
             <a:r>
               <a:rPr sz="1400">
@@ -4352,7 +4610,7 @@
                 </a:solidFill>
                 <a:latin typeface="Consolas"/>
               </a:rPr>
-              <a:t>  22  </a:t>
+              <a:t>  27  </a:t>
             </a:r>
             <a:r>
               <a:rPr sz="1400">
@@ -4377,7 +4635,7 @@
                 </a:solidFill>
                 <a:latin typeface="Consolas"/>
               </a:rPr>
-              <a:t>  23  </a:t>
+              <a:t>  28  </a:t>
             </a:r>
             <a:r>
               <a:rPr sz="1400">
@@ -4557,7 +4815,7 @@
                   <a:srgbClr val="01AEFD"/>
                 </a:solidFill>
               </a:rPr>
-              <a:t>Type this into script.js  (1 of 2)</a:t>
+              <a:t>Type this into script.js  (1 of 3)</a:t>
             </a:r>
           </a:p>
         </p:txBody>
@@ -4596,7 +4854,7 @@
                 </a:solidFill>
                 <a:latin typeface="Consolas"/>
               </a:rPr>
-              <a:t> 174  </a:t>
+              <a:t> 187  </a:t>
             </a:r>
             <a:r>
               <a:rPr sz="1400">
@@ -4621,7 +4879,7 @@
                 </a:solidFill>
                 <a:latin typeface="Consolas"/>
               </a:rPr>
-              <a:t> 175  </a:t>
+              <a:t> 188  </a:t>
             </a:r>
             <a:r>
               <a:rPr sz="1400">
@@ -4646,7 +4904,7 @@
                 </a:solidFill>
                 <a:latin typeface="Consolas"/>
               </a:rPr>
-              <a:t> 176  </a:t>
+              <a:t> 189  </a:t>
             </a:r>
             <a:r>
               <a:rPr sz="1400">
@@ -4671,7 +4929,7 @@
                 </a:solidFill>
                 <a:latin typeface="Consolas"/>
               </a:rPr>
-              <a:t> 177  </a:t>
+              <a:t> 190  </a:t>
             </a:r>
             <a:r>
               <a:rPr sz="1400">
@@ -4696,7 +4954,7 @@
                 </a:solidFill>
                 <a:latin typeface="Consolas"/>
               </a:rPr>
-              <a:t> 178  </a:t>
+              <a:t> 191  </a:t>
             </a:r>
             <a:r>
               <a:rPr sz="1400">
@@ -4721,7 +4979,7 @@
                 </a:solidFill>
                 <a:latin typeface="Consolas"/>
               </a:rPr>
-              <a:t> 179  </a:t>
+              <a:t> 192  </a:t>
             </a:r>
             <a:r>
               <a:rPr sz="1400">
@@ -4746,7 +5004,7 @@
                 </a:solidFill>
                 <a:latin typeface="Consolas"/>
               </a:rPr>
-              <a:t> 180  </a:t>
+              <a:t> 193  </a:t>
             </a:r>
             <a:r>
               <a:rPr sz="1400">
@@ -4771,7 +5029,7 @@
                 </a:solidFill>
                 <a:latin typeface="Consolas"/>
               </a:rPr>
-              <a:t> 181  </a:t>
+              <a:t> 194  </a:t>
             </a:r>
             <a:r>
               <a:rPr sz="1400">
@@ -4796,7 +5054,7 @@
                 </a:solidFill>
                 <a:latin typeface="Consolas"/>
               </a:rPr>
-              <a:t> 182  </a:t>
+              <a:t> 195  </a:t>
             </a:r>
             <a:r>
               <a:rPr sz="1400">
@@ -4821,7 +5079,7 @@
                 </a:solidFill>
                 <a:latin typeface="Consolas"/>
               </a:rPr>
-              <a:t> 183  </a:t>
+              <a:t> 196  </a:t>
             </a:r>
             <a:r>
               <a:rPr sz="1400">
@@ -4846,7 +5104,7 @@
                 </a:solidFill>
                 <a:latin typeface="Consolas"/>
               </a:rPr>
-              <a:t> 184  </a:t>
+              <a:t> 197  </a:t>
             </a:r>
             <a:r>
               <a:rPr sz="1400">
@@ -4871,7 +5129,7 @@
                 </a:solidFill>
                 <a:latin typeface="Consolas"/>
               </a:rPr>
-              <a:t> 185  </a:t>
+              <a:t> 198  </a:t>
             </a:r>
             <a:r>
               <a:rPr sz="1400">
@@ -4896,7 +5154,7 @@
                 </a:solidFill>
                 <a:latin typeface="Consolas"/>
               </a:rPr>
-              <a:t> 186  </a:t>
+              <a:t> 199  </a:t>
             </a:r>
             <a:r>
               <a:rPr sz="1400">
@@ -4921,7 +5179,7 @@
                 </a:solidFill>
                 <a:latin typeface="Consolas"/>
               </a:rPr>
-              <a:t> 187  </a:t>
+              <a:t> 200  </a:t>
             </a:r>
             <a:r>
               <a:rPr sz="1400">
@@ -4946,7 +5204,7 @@
                 </a:solidFill>
                 <a:latin typeface="Consolas"/>
               </a:rPr>
-              <a:t> 188  </a:t>
+              <a:t> 201  </a:t>
             </a:r>
             <a:r>
               <a:rPr sz="1400">
@@ -5014,7 +5272,7 @@
                   <a:srgbClr val="01AEFD"/>
                 </a:solidFill>
               </a:rPr>
-              <a:t>Type this into script.js  (2 of 2)</a:t>
+              <a:t>Type this into script.js  (2 of 3)</a:t>
             </a:r>
           </a:p>
         </p:txBody>
@@ -5053,7 +5311,7 @@
                 </a:solidFill>
                 <a:latin typeface="Consolas"/>
               </a:rPr>
-              <a:t> 189  </a:t>
+              <a:t> 202  </a:t>
             </a:r>
             <a:r>
               <a:rPr sz="1400">
@@ -5078,7 +5336,7 @@
                 </a:solidFill>
                 <a:latin typeface="Consolas"/>
               </a:rPr>
-              <a:t> 190  </a:t>
+              <a:t> 203  </a:t>
             </a:r>
             <a:r>
               <a:rPr sz="1400">
@@ -5103,7 +5361,7 @@
                 </a:solidFill>
                 <a:latin typeface="Consolas"/>
               </a:rPr>
-              <a:t> 191  </a:t>
+              <a:t> 204  </a:t>
             </a:r>
             <a:r>
               <a:rPr sz="1400">
@@ -5128,7 +5386,7 @@
                 </a:solidFill>
                 <a:latin typeface="Consolas"/>
               </a:rPr>
-              <a:t> 192  </a:t>
+              <a:t> 205  </a:t>
             </a:r>
             <a:r>
               <a:rPr sz="1400">
@@ -5153,7 +5411,7 @@
                 </a:solidFill>
                 <a:latin typeface="Consolas"/>
               </a:rPr>
-              <a:t> 193  </a:t>
+              <a:t> 206  </a:t>
             </a:r>
             <a:r>
               <a:rPr sz="1400">
@@ -5178,7 +5436,7 @@
                 </a:solidFill>
                 <a:latin typeface="Consolas"/>
               </a:rPr>
-              <a:t> 194  </a:t>
+              <a:t> 207  </a:t>
             </a:r>
             <a:r>
               <a:rPr sz="1400">
@@ -5203,7 +5461,7 @@
                 </a:solidFill>
                 <a:latin typeface="Consolas"/>
               </a:rPr>
-              <a:t> 195  </a:t>
+              <a:t> 208  </a:t>
             </a:r>
             <a:r>
               <a:rPr sz="1400">
@@ -5228,7 +5486,7 @@
                 </a:solidFill>
                 <a:latin typeface="Consolas"/>
               </a:rPr>
-              <a:t> 196  </a:t>
+              <a:t> 209  </a:t>
             </a:r>
             <a:r>
               <a:rPr sz="1400">
@@ -5237,7 +5495,7 @@
                 </a:solidFill>
                 <a:latin typeface="Consolas"/>
               </a:rPr>
-              <a:t>  history.length = 0;      // empty the list without making a new one</a:t>
+              <a:t>  // A list is not enough - check what is IN it. Without this, [1,2,3] loads</a:t>
             </a:r>
           </a:p>
           <a:p>
@@ -5253,7 +5511,7 @@
                 </a:solidFill>
                 <a:latin typeface="Consolas"/>
               </a:rPr>
-              <a:t> 197  </a:t>
+              <a:t> 210  </a:t>
             </a:r>
             <a:r>
               <a:rPr sz="1400">
@@ -5262,7 +5520,7 @@
                 </a:solidFill>
                 <a:latin typeface="Consolas"/>
               </a:rPr>
-              <a:t>  chat.textContent = '';   // clear the screen too</a:t>
+              <a:t>  // happily and then crashes later inside trimHistory, miles from the cause.</a:t>
             </a:r>
           </a:p>
           <a:p>
@@ -5278,7 +5536,7 @@
                 </a:solidFill>
                 <a:latin typeface="Consolas"/>
               </a:rPr>
-              <a:t> 198  </a:t>
+              <a:t> 211  </a:t>
             </a:r>
             <a:r>
               <a:rPr sz="1400">
@@ -5303,7 +5561,7 @@
                 </a:solidFill>
                 <a:latin typeface="Consolas"/>
               </a:rPr>
-              <a:t> 199  </a:t>
+              <a:t> 212  </a:t>
             </a:r>
             <a:r>
               <a:rPr sz="1400">
@@ -5312,7 +5570,7 @@
                 </a:solidFill>
                 <a:latin typeface="Consolas"/>
               </a:rPr>
-              <a:t>    history.push(message);</a:t>
+              <a:t>    if (!message || typeof message.content !== 'string') {</a:t>
             </a:r>
           </a:p>
           <a:p>
@@ -5328,7 +5586,7 @@
                 </a:solidFill>
                 <a:latin typeface="Consolas"/>
               </a:rPr>
-              <a:t> 200  </a:t>
+              <a:t> 213  </a:t>
             </a:r>
             <a:r>
               <a:rPr sz="1400">
@@ -5337,7 +5595,7 @@
                 </a:solidFill>
                 <a:latin typeface="Consolas"/>
               </a:rPr>
-              <a:t>    addLine(message.role === 'user' ? 'you' : 'bot', message.content);</a:t>
+              <a:t>      addLine('problem', 'That saved chat has something odd inside it.');</a:t>
             </a:r>
           </a:p>
           <a:p>
@@ -5353,7 +5611,7 @@
                 </a:solidFill>
                 <a:latin typeface="Consolas"/>
               </a:rPr>
-              <a:t> 201  </a:t>
+              <a:t> 214  </a:t>
             </a:r>
             <a:r>
               <a:rPr sz="1400">
@@ -5362,32 +5620,57 @@
                 </a:solidFill>
                 <a:latin typeface="Consolas"/>
               </a:rPr>
+              <a:t>      return;</a:t>
+            </a:r>
+          </a:p>
+          <a:p>
+            <a:pPr>
+              <a:spcAft>
+                <a:spcPts val="0"/>
+              </a:spcAft>
+            </a:pPr>
+            <a:r>
+              <a:rPr sz="1400">
+                <a:solidFill>
+                  <a:srgbClr val="6D8C97"/>
+                </a:solidFill>
+                <a:latin typeface="Consolas"/>
+              </a:rPr>
+              <a:t> 215  </a:t>
+            </a:r>
+            <a:r>
+              <a:rPr sz="1400">
+                <a:solidFill>
+                  <a:srgbClr val="7FE0A0"/>
+                </a:solidFill>
+                <a:latin typeface="Consolas"/>
+              </a:rPr>
+              <a:t>    }</a:t>
+            </a:r>
+          </a:p>
+          <a:p>
+            <a:pPr>
+              <a:spcAft>
+                <a:spcPts val="0"/>
+              </a:spcAft>
+            </a:pPr>
+            <a:r>
+              <a:rPr sz="1400">
+                <a:solidFill>
+                  <a:srgbClr val="6D8C97"/>
+                </a:solidFill>
+                <a:latin typeface="Consolas"/>
+              </a:rPr>
+              <a:t> 216  </a:t>
+            </a:r>
+            <a:r>
+              <a:rPr sz="1400">
+                <a:solidFill>
+                  <a:srgbClr val="7FE0A0"/>
+                </a:solidFill>
+                <a:latin typeface="Consolas"/>
+              </a:rPr>
               <a:t>  }</a:t>
-            </a:r>
-          </a:p>
-          <a:p>
-            <a:pPr>
-              <a:spcAft>
-                <a:spcPts val="0"/>
-              </a:spcAft>
-            </a:pPr>
-            <a:r>
-              <a:rPr sz="1400">
-                <a:solidFill>
-                  <a:srgbClr val="6D8C97"/>
-                </a:solidFill>
-                <a:latin typeface="Consolas"/>
-              </a:rPr>
-              <a:t> 202  </a:t>
-            </a:r>
-            <a:r>
-              <a:rPr sz="1400">
-                <a:solidFill>
-                  <a:srgbClr val="7FE0A0"/>
-                </a:solidFill>
-                <a:latin typeface="Consolas"/>
-              </a:rPr>
-              <a:t>});</a:t>
             </a:r>
           </a:p>
         </p:txBody>

--- a/ai101/slides/week-12.pptx
+++ b/ai101/slides/week-12.pptx
@@ -10524,12 +10524,27 @@
               </a:spcAft>
             </a:pPr>
             <a:r>
+              <a:rPr sz="2800">
+                <a:solidFill>
+                  <a:srgbClr val="01AEFD"/>
+                </a:solidFill>
+              </a:rPr>
+              <a:t>Array.isArray(loaded)</a:t>
+            </a:r>
+          </a:p>
+          <a:p>
+            <a:pPr>
+              <a:spcAft>
+                <a:spcPts val="1400"/>
+              </a:spcAft>
+            </a:pPr>
+            <a:r>
               <a:rPr sz="2400">
                 <a:solidFill>
                   <a:srgbClr val="1F2A37"/>
                 </a:solidFill>
               </a:rPr>
-              <a:t>• True only when the value is really a LIST (an array).</a:t>
+              <a:t>• True only when the value is really a LIST (week 4), not just any data.</a:t>
             </a:r>
           </a:p>
           <a:p>
@@ -10544,7 +10559,22 @@
                   <a:srgbClr val="1F2A37"/>
                 </a:solidFill>
               </a:rPr>
-              <a:t>• Catches junk before it causes a crash later on.</a:t>
+              <a:t>• A yes/no check, so it fits inside an if (week 2).</a:t>
+            </a:r>
+          </a:p>
+          <a:p>
+            <a:pPr>
+              <a:spcAft>
+                <a:spcPts val="1400"/>
+              </a:spcAft>
+            </a:pPr>
+            <a:r>
+              <a:rPr sz="2400">
+                <a:solidFill>
+                  <a:srgbClr val="1F2A37"/>
+                </a:solidFill>
+              </a:rPr>
+              <a:t>• It guards a loaded chat before we treat it like history.</a:t>
             </a:r>
           </a:p>
         </p:txBody>
@@ -14016,6 +14046,21 @@
               </a:spcAft>
             </a:pPr>
             <a:r>
+              <a:rPr sz="2800">
+                <a:solidFill>
+                  <a:srgbClr val="01AEFD"/>
+                </a:solidFill>
+              </a:rPr>
+              <a:t>typeof message.content === 'string'</a:t>
+            </a:r>
+          </a:p>
+          <a:p>
+            <a:pPr>
+              <a:spcAft>
+                <a:spcPts val="1400"/>
+              </a:spcAft>
+            </a:pPr>
+            <a:r>
               <a:rPr sz="2400">
                 <a:solidFill>
                   <a:srgbClr val="1F2A37"/>
@@ -14036,7 +14081,22 @@
                   <a:srgbClr val="1F2A37"/>
                 </a:solidFill>
               </a:rPr>
-              <a:t>• typeof x === 'string' checks x is text.</a:t>
+              <a:t>• typeof x === 'string' checks x is text (week 1), using === (week 2).</a:t>
+            </a:r>
+          </a:p>
+          <a:p>
+            <a:pPr>
+              <a:spcAft>
+                <a:spcPts val="1400"/>
+              </a:spcAft>
+            </a:pPr>
+            <a:r>
+              <a:rPr sz="2400">
+                <a:solidFill>
+                  <a:srgbClr val="1F2A37"/>
+                </a:solidFill>
+              </a:rPr>
+              <a:t>• It catches a broken saved message before it can crash later.</a:t>
             </a:r>
           </a:p>
         </p:txBody>

--- a/ai101/slides/week-12.pptx
+++ b/ai101/slides/week-12.pptx
@@ -26193,7 +26193,7 @@
                   <a:srgbClr val="1F2A37"/>
                 </a:solidFill>
               </a:rPr>
-              <a:t>• A. The history list turned into neatly-spaced text</a:t>
+              <a:t>• A. A shorter history</a:t>
             </a:r>
           </a:p>
           <a:p>
@@ -26208,7 +26208,7 @@
                   <a:srgbClr val="1F2A37"/>
                 </a:solidFill>
               </a:rPr>
-              <a:t>• B. A shorter history</a:t>
+              <a:t>• B. The AI's reply</a:t>
             </a:r>
           </a:p>
           <a:p>
@@ -26223,7 +26223,7 @@
                   <a:srgbClr val="1F2A37"/>
                 </a:solidFill>
               </a:rPr>
-              <a:t>• C. The AI's reply</a:t>
+              <a:t>• C. The history list turned into neatly-spaced text</a:t>
             </a:r>
           </a:p>
           <a:p>
@@ -26368,7 +26368,7 @@
                   <a:srgbClr val="1F2A37"/>
                 </a:solidFill>
               </a:rPr>
-              <a:t>• A. The history list turned into neatly-spaced text (correct)</a:t>
+              <a:t>• A. A shorter history</a:t>
             </a:r>
           </a:p>
           <a:p>
@@ -26383,7 +26383,7 @@
                   <a:srgbClr val="1F2A37"/>
                 </a:solidFill>
               </a:rPr>
-              <a:t>• B. A shorter history</a:t>
+              <a:t>• B. The AI's reply</a:t>
             </a:r>
           </a:p>
           <a:p>
@@ -26398,7 +26398,7 @@
                   <a:srgbClr val="1F2A37"/>
                 </a:solidFill>
               </a:rPr>
-              <a:t>• C. The AI's reply</a:t>
+              <a:t>• C. The history list turned into neatly-spaced text (correct)</a:t>
             </a:r>
           </a:p>
           <a:p>
@@ -26683,7 +26683,7 @@
                   <a:srgbClr val="1F2A37"/>
                 </a:solidFill>
               </a:rPr>
-              <a:t>• A. A person might paste text that is not valid JSON</a:t>
+              <a:t>• A. To make it faster</a:t>
             </a:r>
           </a:p>
           <a:p>
@@ -26698,7 +26698,7 @@
                   <a:srgbClr val="1F2A37"/>
                 </a:solidFill>
               </a:rPr>
-              <a:t>• B. To make it faster</a:t>
+              <a:t>• B. To save the chat</a:t>
             </a:r>
           </a:p>
           <a:p>
@@ -26713,7 +26713,7 @@
                   <a:srgbClr val="1F2A37"/>
                 </a:solidFill>
               </a:rPr>
-              <a:t>• C. To save the chat</a:t>
+              <a:t>• C. It is never needed</a:t>
             </a:r>
           </a:p>
           <a:p>
@@ -26728,7 +26728,7 @@
                   <a:srgbClr val="1F2A37"/>
                 </a:solidFill>
               </a:rPr>
-              <a:t>• D. It is never needed</a:t>
+              <a:t>• D. A person might paste text that is not valid JSON</a:t>
             </a:r>
           </a:p>
           <a:p>
@@ -26858,7 +26858,7 @@
                   <a:srgbClr val="1F2A37"/>
                 </a:solidFill>
               </a:rPr>
-              <a:t>• A. A person might paste text that is not valid JSON (correct)</a:t>
+              <a:t>• A. To make it faster</a:t>
             </a:r>
           </a:p>
           <a:p>
@@ -26873,7 +26873,7 @@
                   <a:srgbClr val="1F2A37"/>
                 </a:solidFill>
               </a:rPr>
-              <a:t>• B. To make it faster</a:t>
+              <a:t>• B. To save the chat</a:t>
             </a:r>
           </a:p>
           <a:p>
@@ -26888,7 +26888,7 @@
                   <a:srgbClr val="1F2A37"/>
                 </a:solidFill>
               </a:rPr>
-              <a:t>• C. To save the chat</a:t>
+              <a:t>• C. It is never needed</a:t>
             </a:r>
           </a:p>
           <a:p>
@@ -26903,7 +26903,7 @@
                   <a:srgbClr val="1F2A37"/>
                 </a:solidFill>
               </a:rPr>
-              <a:t>• D. It is never needed</a:t>
+              <a:t>• D. A person might paste text that is not valid JSON (correct)</a:t>
             </a:r>
           </a:p>
           <a:p>
@@ -27033,7 +27033,7 @@
                   <a:srgbClr val="1F2A37"/>
                 </a:solidFill>
               </a:rPr>
-              <a:t>• A. a list (an array)</a:t>
+              <a:t>• A. a number</a:t>
             </a:r>
           </a:p>
           <a:p>
@@ -27048,7 +27048,7 @@
                   <a:srgbClr val="1F2A37"/>
                 </a:solidFill>
               </a:rPr>
-              <a:t>• B. a number</a:t>
+              <a:t>• B. any text at all</a:t>
             </a:r>
           </a:p>
           <a:p>
@@ -27063,7 +27063,7 @@
                   <a:srgbClr val="1F2A37"/>
                 </a:solidFill>
               </a:rPr>
-              <a:t>• C. any text at all</a:t>
+              <a:t>• C. a list (an array)</a:t>
             </a:r>
           </a:p>
           <a:p>
@@ -27208,7 +27208,7 @@
                   <a:srgbClr val="1F2A37"/>
                 </a:solidFill>
               </a:rPr>
-              <a:t>• A. a list (an array) (correct)</a:t>
+              <a:t>• A. a number</a:t>
             </a:r>
           </a:p>
           <a:p>
@@ -27223,7 +27223,7 @@
                   <a:srgbClr val="1F2A37"/>
                 </a:solidFill>
               </a:rPr>
-              <a:t>• B. a number</a:t>
+              <a:t>• B. any text at all</a:t>
             </a:r>
           </a:p>
           <a:p>
@@ -27238,7 +27238,7 @@
                   <a:srgbClr val="1F2A37"/>
                 </a:solidFill>
               </a:rPr>
-              <a:t>• C. any text at all</a:t>
+              <a:t>• C. a list (an array) (correct)</a:t>
             </a:r>
           </a:p>
           <a:p>
@@ -27733,7 +27733,7 @@
                   <a:srgbClr val="1F2A37"/>
                 </a:solidFill>
               </a:rPr>
-              <a:t>• A. Empties the list but keeps the same list</a:t>
+              <a:t>• A. Makes a brand-new empty list</a:t>
             </a:r>
           </a:p>
           <a:p>
@@ -27748,7 +27748,7 @@
                   <a:srgbClr val="1F2A37"/>
                 </a:solidFill>
               </a:rPr>
-              <a:t>• B. Makes a brand-new empty list</a:t>
+              <a:t>• B. Deletes the variable</a:t>
             </a:r>
           </a:p>
           <a:p>
@@ -27763,7 +27763,7 @@
                   <a:srgbClr val="1F2A37"/>
                 </a:solidFill>
               </a:rPr>
-              <a:t>• C. Deletes the variable</a:t>
+              <a:t>• C. Adds a zero to the list</a:t>
             </a:r>
           </a:p>
           <a:p>
@@ -27778,7 +27778,7 @@
                   <a:srgbClr val="1F2A37"/>
                 </a:solidFill>
               </a:rPr>
-              <a:t>• D. Adds a zero to the list</a:t>
+              <a:t>• D. Empties the list but keeps the same list</a:t>
             </a:r>
           </a:p>
           <a:p>
@@ -27908,7 +27908,7 @@
                   <a:srgbClr val="1F2A37"/>
                 </a:solidFill>
               </a:rPr>
-              <a:t>• A. Empties the list but keeps the same list (correct)</a:t>
+              <a:t>• A. Makes a brand-new empty list</a:t>
             </a:r>
           </a:p>
           <a:p>
@@ -27923,7 +27923,7 @@
                   <a:srgbClr val="1F2A37"/>
                 </a:solidFill>
               </a:rPr>
-              <a:t>• B. Makes a brand-new empty list</a:t>
+              <a:t>• B. Deletes the variable</a:t>
             </a:r>
           </a:p>
           <a:p>
@@ -27938,7 +27938,7 @@
                   <a:srgbClr val="1F2A37"/>
                 </a:solidFill>
               </a:rPr>
-              <a:t>• C. Deletes the variable</a:t>
+              <a:t>• C. Adds a zero to the list</a:t>
             </a:r>
           </a:p>
           <a:p>
@@ -27953,7 +27953,7 @@
                   <a:srgbClr val="1F2A37"/>
                 </a:solidFill>
               </a:rPr>
-              <a:t>• D. Adds a zero to the list</a:t>
+              <a:t>• D. Empties the list but keeps the same list (correct)</a:t>
             </a:r>
           </a:p>
           <a:p>
@@ -28083,7 +28083,7 @@
                   <a:srgbClr val="1F2A37"/>
                 </a:solidFill>
               </a:rPr>
-              <a:t>• A. An array that remembers every message</a:t>
+              <a:t>• A. The AI's name</a:t>
             </a:r>
           </a:p>
           <a:p>
@@ -28098,7 +28098,7 @@
                   <a:srgbClr val="1F2A37"/>
                 </a:solidFill>
               </a:rPr>
-              <a:t>• B. The AI's name</a:t>
+              <a:t>• B. A single string</a:t>
             </a:r>
           </a:p>
           <a:p>
@@ -28113,7 +28113,7 @@
                   <a:srgbClr val="1F2A37"/>
                 </a:solidFill>
               </a:rPr>
-              <a:t>• C. A single string</a:t>
+              <a:t>• C. An array that remembers every message</a:t>
             </a:r>
           </a:p>
           <a:p>
@@ -28258,7 +28258,7 @@
                   <a:srgbClr val="1F2A37"/>
                 </a:solidFill>
               </a:rPr>
-              <a:t>• A. An array that remembers every message (correct)</a:t>
+              <a:t>• A. The AI's name</a:t>
             </a:r>
           </a:p>
           <a:p>
@@ -28273,7 +28273,7 @@
                   <a:srgbClr val="1F2A37"/>
                 </a:solidFill>
               </a:rPr>
-              <a:t>• B. The AI's name</a:t>
+              <a:t>• B. A single string</a:t>
             </a:r>
           </a:p>
           <a:p>
@@ -28288,7 +28288,7 @@
                   <a:srgbClr val="1F2A37"/>
                 </a:solidFill>
               </a:rPr>
-              <a:t>• C. A single string</a:t>
+              <a:t>• C. An array that remembers every message (correct)</a:t>
             </a:r>
           </a:p>
           <a:p>
@@ -28598,7 +28598,7 @@
                   <a:srgbClr val="1F2A37"/>
                 </a:solidFill>
               </a:rPr>
-              <a:t>• A. turns JSON text back into an object or list</a:t>
+              <a:t>• A. sends a network request</a:t>
             </a:r>
           </a:p>
           <a:p>
@@ -28613,7 +28613,7 @@
                   <a:srgbClr val="1F2A37"/>
                 </a:solidFill>
               </a:rPr>
-              <a:t>• B. sends a network request</a:t>
+              <a:t>• B. turns JSON text back into an object or list</a:t>
             </a:r>
           </a:p>
           <a:p>
@@ -28773,7 +28773,7 @@
                   <a:srgbClr val="1F2A37"/>
                 </a:solidFill>
               </a:rPr>
-              <a:t>• A. turns JSON text back into an object or list (correct)</a:t>
+              <a:t>• A. sends a network request</a:t>
             </a:r>
           </a:p>
           <a:p>
@@ -28788,7 +28788,7 @@
                   <a:srgbClr val="1F2A37"/>
                 </a:solidFill>
               </a:rPr>
-              <a:t>• B. sends a network request</a:t>
+              <a:t>• B. turns JSON text back into an object or list (correct)</a:t>
             </a:r>
           </a:p>
           <a:p>
